--- a/chapter1/clips/clip-01-introduction-to-datasets/clip.pptx
+++ b/chapter1/clips/clip-01-introduction-to-datasets/clip.pptx
@@ -10,9 +10,8 @@
     <p:sldId id="258" r:id="rId9"/>
     <p:sldId id="259" r:id="rId10"/>
     <p:sldId id="260" r:id="rId11"/>
-    <p:sldId id="261" r:id="rId12"/>
-    <p:sldId id="262" r:id="rId13"/>
-    <p:sldId id="263" r:id="rId14"/>
+    <p:sldId id="261" r:id="rId13"/>
+    <p:sldId id="262" r:id="rId14"/>
   </p:sldIdLst>
   <p:sldSz cx="12191695" cy="6858000" type="screen4x3"/>
   <p:notesSz cx="6858000" cy="9144000"/>
@@ -112,6 +111,511 @@
     </a:lvl9pPr>
   </p:defaultTextStyle>
 </p:presentation>
+</file>
+
+<file path=ppt/notesMasters/notesMaster1.xml><?xml version="1.0" encoding="utf-8"?>
+<p:notesMaster xmlns:a="http://schemas.openxmlformats.org/drawingml/2006/main" xmlns:p="http://schemas.openxmlformats.org/presentationml/2006/main" xmlns:r="http://schemas.openxmlformats.org/officeDocument/2006/relationships">
+  <p:cSld>
+    <p:bg>
+      <p:bgRef idx="1001">
+        <a:schemeClr val="bg1"/>
+      </p:bgRef>
+    </p:bg>
+    <p:spTree>
+      <p:nvGrpSpPr>
+        <p:cNvPr id="1" name=""/>
+        <p:cNvGrpSpPr/>
+        <p:nvPr/>
+      </p:nvGrpSpPr>
+      <p:grpSpPr>
+        <a:xfrm>
+          <a:off x="0" y="0"/>
+          <a:ext cx="0" cy="0"/>
+          <a:chOff x="0" y="0"/>
+          <a:chExt cx="0" cy="0"/>
+        </a:xfrm>
+      </p:grpSpPr>
+      <p:sp>
+        <p:nvSpPr>
+          <p:cNvPr id="2" name="Header Placeholder 1"/>
+          <p:cNvSpPr>
+            <a:spLocks noGrp="1"/>
+          </p:cNvSpPr>
+          <p:nvPr>
+            <p:ph type="hdr" sz="quarter"/>
+          </p:nvPr>
+        </p:nvSpPr>
+        <p:spPr>
+          <a:xfrm>
+            <a:off x="0" y="0"/>
+            <a:ext cx="2971800" cy="457200"/>
+          </a:xfrm>
+          <a:prstGeom prst="rect">
+            <a:avLst/>
+          </a:prstGeom>
+        </p:spPr>
+        <p:txBody>
+          <a:bodyPr vert="horz" lIns="91440" tIns="45720" rIns="91440" bIns="45720" rtlCol="0"/>
+          <a:lstStyle>
+            <a:lvl1pPr algn="l">
+              <a:defRPr sz="1200"/>
+            </a:lvl1pPr>
+          </a:lstStyle>
+          <a:p>
+            <a:endParaRPr lang="en-US"/>
+          </a:p>
+        </p:txBody>
+      </p:sp>
+      <p:sp>
+        <p:nvSpPr>
+          <p:cNvPr id="3" name="Date Placeholder 2"/>
+          <p:cNvSpPr>
+            <a:spLocks noGrp="1"/>
+          </p:cNvSpPr>
+          <p:nvPr>
+            <p:ph type="dt" idx="1"/>
+          </p:nvPr>
+        </p:nvSpPr>
+        <p:spPr>
+          <a:xfrm>
+            <a:off x="3884613" y="0"/>
+            <a:ext cx="2971800" cy="457200"/>
+          </a:xfrm>
+          <a:prstGeom prst="rect">
+            <a:avLst/>
+          </a:prstGeom>
+        </p:spPr>
+        <p:txBody>
+          <a:bodyPr vert="horz" lIns="91440" tIns="45720" rIns="91440" bIns="45720" rtlCol="0"/>
+          <a:lstStyle>
+            <a:lvl1pPr algn="r">
+              <a:defRPr sz="1200"/>
+            </a:lvl1pPr>
+          </a:lstStyle>
+          <a:p>
+            <a:fld id="{0F89C1C7-3DCD-1040-A9CF-14679D8B5DDD}" type="datetimeFigureOut">
+              <a:rPr lang="en-US" smtClean="0"/>
+              <a:t>10/17/16</a:t>
+            </a:fld>
+            <a:endParaRPr lang="en-US"/>
+          </a:p>
+        </p:txBody>
+      </p:sp>
+      <p:sp>
+        <p:nvSpPr>
+          <p:cNvPr id="4" name="Slide Image Placeholder 3"/>
+          <p:cNvSpPr>
+            <a:spLocks noGrp="1" noRot="1" noChangeAspect="1"/>
+          </p:cNvSpPr>
+          <p:nvPr>
+            <p:ph type="sldImg" idx="2"/>
+          </p:nvPr>
+        </p:nvSpPr>
+        <p:spPr>
+          <a:xfrm>
+            <a:off x="1143000" y="685800"/>
+            <a:ext cx="4572000" cy="3429000"/>
+          </a:xfrm>
+          <a:prstGeom prst="rect">
+            <a:avLst/>
+          </a:prstGeom>
+          <a:noFill/>
+          <a:ln w="12700">
+            <a:solidFill>
+              <a:prstClr val="black"/>
+            </a:solidFill>
+          </a:ln>
+        </p:spPr>
+        <p:txBody>
+          <a:bodyPr vert="horz" lIns="91440" tIns="45720" rIns="91440" bIns="45720" rtlCol="0" anchor="ctr"/>
+          <a:lstStyle/>
+          <a:p>
+            <a:endParaRPr lang="en-US"/>
+          </a:p>
+        </p:txBody>
+      </p:sp>
+      <p:sp>
+        <p:nvSpPr>
+          <p:cNvPr id="5" name="Notes Placeholder 4"/>
+          <p:cNvSpPr>
+            <a:spLocks noGrp="1"/>
+          </p:cNvSpPr>
+          <p:nvPr>
+            <p:ph type="body" sz="quarter" idx="3"/>
+          </p:nvPr>
+        </p:nvSpPr>
+        <p:spPr>
+          <a:xfrm>
+            <a:off x="685800" y="4343400"/>
+            <a:ext cx="5486400" cy="4114800"/>
+          </a:xfrm>
+          <a:prstGeom prst="rect">
+            <a:avLst/>
+          </a:prstGeom>
+        </p:spPr>
+        <p:txBody>
+          <a:bodyPr vert="horz" lIns="91440" tIns="45720" rIns="91440" bIns="45720" rtlCol="0"/>
+          <a:lstStyle/>
+          <a:p>
+            <a:pPr lvl="0"/>
+            <a:r>
+              <a:rPr lang="en-US" smtClean="0"/>
+              <a:t>Click to edit Master text styles</a:t>
+            </a:r>
+          </a:p>
+          <a:p>
+            <a:pPr lvl="1"/>
+            <a:r>
+              <a:rPr lang="en-US" smtClean="0"/>
+              <a:t>Second level</a:t>
+            </a:r>
+          </a:p>
+          <a:p>
+            <a:pPr lvl="2"/>
+            <a:r>
+              <a:rPr lang="en-US" smtClean="0"/>
+              <a:t>Third level</a:t>
+            </a:r>
+          </a:p>
+          <a:p>
+            <a:pPr lvl="3"/>
+            <a:r>
+              <a:rPr lang="en-US" smtClean="0"/>
+              <a:t>Fourth level</a:t>
+            </a:r>
+          </a:p>
+          <a:p>
+            <a:pPr lvl="4"/>
+            <a:r>
+              <a:rPr lang="en-US" smtClean="0"/>
+              <a:t>Fifth level</a:t>
+            </a:r>
+            <a:endParaRPr lang="en-US"/>
+          </a:p>
+        </p:txBody>
+      </p:sp>
+      <p:sp>
+        <p:nvSpPr>
+          <p:cNvPr id="6" name="Footer Placeholder 5"/>
+          <p:cNvSpPr>
+            <a:spLocks noGrp="1"/>
+          </p:cNvSpPr>
+          <p:nvPr>
+            <p:ph type="ftr" sz="quarter" idx="4"/>
+          </p:nvPr>
+        </p:nvSpPr>
+        <p:spPr>
+          <a:xfrm>
+            <a:off x="0" y="8685213"/>
+            <a:ext cx="2971800" cy="457200"/>
+          </a:xfrm>
+          <a:prstGeom prst="rect">
+            <a:avLst/>
+          </a:prstGeom>
+        </p:spPr>
+        <p:txBody>
+          <a:bodyPr vert="horz" lIns="91440" tIns="45720" rIns="91440" bIns="45720" rtlCol="0" anchor="b"/>
+          <a:lstStyle>
+            <a:lvl1pPr algn="l">
+              <a:defRPr sz="1200"/>
+            </a:lvl1pPr>
+          </a:lstStyle>
+          <a:p>
+            <a:endParaRPr lang="en-US"/>
+          </a:p>
+        </p:txBody>
+      </p:sp>
+      <p:sp>
+        <p:nvSpPr>
+          <p:cNvPr id="7" name="Slide Number Placeholder 6"/>
+          <p:cNvSpPr>
+            <a:spLocks noGrp="1"/>
+          </p:cNvSpPr>
+          <p:nvPr>
+            <p:ph type="sldNum" sz="quarter" idx="5"/>
+          </p:nvPr>
+        </p:nvSpPr>
+        <p:spPr>
+          <a:xfrm>
+            <a:off x="3884613" y="8685213"/>
+            <a:ext cx="2971800" cy="457200"/>
+          </a:xfrm>
+          <a:prstGeom prst="rect">
+            <a:avLst/>
+          </a:prstGeom>
+        </p:spPr>
+        <p:txBody>
+          <a:bodyPr vert="horz" lIns="91440" tIns="45720" rIns="91440" bIns="45720" rtlCol="0" anchor="b"/>
+          <a:lstStyle>
+            <a:lvl1pPr algn="r">
+              <a:defRPr sz="1200"/>
+            </a:lvl1pPr>
+          </a:lstStyle>
+          <a:p>
+            <a:fld id="{BB5E49A5-4136-284D-997B-48E1D791AD67}" type="slidenum">
+              <a:rPr lang="en-US" smtClean="0"/>
+              <a:t>‹#›</a:t>
+            </a:fld>
+            <a:endParaRPr lang="en-US"/>
+          </a:p>
+        </p:txBody>
+      </p:sp>
+    </p:spTree>
+    <p:extLst>
+      <p:ext uri="{BB962C8B-B14F-4D97-AF65-F5344CB8AC3E}">
+        <p14:creationId xmlns:p14="http://schemas.microsoft.com/office/powerpoint/2010/main" val="2623252185"/>
+      </p:ext>
+    </p:extLst>
+  </p:cSld>
+  <p:clrMap bg1="lt1" tx1="dk1" bg2="lt2" tx2="dk2" accent1="accent1" accent2="accent2" accent3="accent3" accent4="accent4" accent5="accent5" accent6="accent6" hlink="hlink" folHlink="folHlink"/>
+  <p:notesStyle>
+    <a:lvl1pPr marL="0" algn="l" defTabSz="457200" rtl="0" eaLnBrk="1" latinLnBrk="0" hangingPunct="1">
+      <a:defRPr sz="1200" kern="1200">
+        <a:solidFill>
+          <a:schemeClr val="tx1"/>
+        </a:solidFill>
+        <a:latin typeface="+mn-lt"/>
+        <a:ea typeface="+mn-ea"/>
+        <a:cs typeface="+mn-cs"/>
+      </a:defRPr>
+    </a:lvl1pPr>
+    <a:lvl2pPr marL="457200" algn="l" defTabSz="457200" rtl="0" eaLnBrk="1" latinLnBrk="0" hangingPunct="1">
+      <a:defRPr sz="1200" kern="1200">
+        <a:solidFill>
+          <a:schemeClr val="tx1"/>
+        </a:solidFill>
+        <a:latin typeface="+mn-lt"/>
+        <a:ea typeface="+mn-ea"/>
+        <a:cs typeface="+mn-cs"/>
+      </a:defRPr>
+    </a:lvl2pPr>
+    <a:lvl3pPr marL="914400" algn="l" defTabSz="457200" rtl="0" eaLnBrk="1" latinLnBrk="0" hangingPunct="1">
+      <a:defRPr sz="1200" kern="1200">
+        <a:solidFill>
+          <a:schemeClr val="tx1"/>
+        </a:solidFill>
+        <a:latin typeface="+mn-lt"/>
+        <a:ea typeface="+mn-ea"/>
+        <a:cs typeface="+mn-cs"/>
+      </a:defRPr>
+    </a:lvl3pPr>
+    <a:lvl4pPr marL="1371600" algn="l" defTabSz="457200" rtl="0" eaLnBrk="1" latinLnBrk="0" hangingPunct="1">
+      <a:defRPr sz="1200" kern="1200">
+        <a:solidFill>
+          <a:schemeClr val="tx1"/>
+        </a:solidFill>
+        <a:latin typeface="+mn-lt"/>
+        <a:ea typeface="+mn-ea"/>
+        <a:cs typeface="+mn-cs"/>
+      </a:defRPr>
+    </a:lvl4pPr>
+    <a:lvl5pPr marL="1828800" algn="l" defTabSz="457200" rtl="0" eaLnBrk="1" latinLnBrk="0" hangingPunct="1">
+      <a:defRPr sz="1200" kern="1200">
+        <a:solidFill>
+          <a:schemeClr val="tx1"/>
+        </a:solidFill>
+        <a:latin typeface="+mn-lt"/>
+        <a:ea typeface="+mn-ea"/>
+        <a:cs typeface="+mn-cs"/>
+      </a:defRPr>
+    </a:lvl5pPr>
+    <a:lvl6pPr marL="2286000" algn="l" defTabSz="457200" rtl="0" eaLnBrk="1" latinLnBrk="0" hangingPunct="1">
+      <a:defRPr sz="1200" kern="1200">
+        <a:solidFill>
+          <a:schemeClr val="tx1"/>
+        </a:solidFill>
+        <a:latin typeface="+mn-lt"/>
+        <a:ea typeface="+mn-ea"/>
+        <a:cs typeface="+mn-cs"/>
+      </a:defRPr>
+    </a:lvl6pPr>
+    <a:lvl7pPr marL="2743200" algn="l" defTabSz="457200" rtl="0" eaLnBrk="1" latinLnBrk="0" hangingPunct="1">
+      <a:defRPr sz="1200" kern="1200">
+        <a:solidFill>
+          <a:schemeClr val="tx1"/>
+        </a:solidFill>
+        <a:latin typeface="+mn-lt"/>
+        <a:ea typeface="+mn-ea"/>
+        <a:cs typeface="+mn-cs"/>
+      </a:defRPr>
+    </a:lvl7pPr>
+    <a:lvl8pPr marL="3200400" algn="l" defTabSz="457200" rtl="0" eaLnBrk="1" latinLnBrk="0" hangingPunct="1">
+      <a:defRPr sz="1200" kern="1200">
+        <a:solidFill>
+          <a:schemeClr val="tx1"/>
+        </a:solidFill>
+        <a:latin typeface="+mn-lt"/>
+        <a:ea typeface="+mn-ea"/>
+        <a:cs typeface="+mn-cs"/>
+      </a:defRPr>
+    </a:lvl8pPr>
+    <a:lvl9pPr marL="3657600" algn="l" defTabSz="457200" rtl="0" eaLnBrk="1" latinLnBrk="0" hangingPunct="1">
+      <a:defRPr sz="1200" kern="1200">
+        <a:solidFill>
+          <a:schemeClr val="tx1"/>
+        </a:solidFill>
+        <a:latin typeface="+mn-lt"/>
+        <a:ea typeface="+mn-ea"/>
+        <a:cs typeface="+mn-cs"/>
+      </a:defRPr>
+    </a:lvl9pPr>
+  </p:notesStyle>
+</p:notesMaster>
+</file>
+
+<file path=ppt/notesSlides/notesSlide1.xml><?xml version="1.0" encoding="utf-8"?>
+<p:notes xmlns:a="http://schemas.openxmlformats.org/drawingml/2006/main" xmlns:p="http://schemas.openxmlformats.org/presentationml/2006/main" xmlns:r="http://schemas.openxmlformats.org/officeDocument/2006/relationships">
+  <p:cSld>
+    <p:spTree>
+      <p:nvGrpSpPr>
+        <p:cNvPr id="1" name=""/>
+        <p:cNvGrpSpPr/>
+        <p:nvPr/>
+      </p:nvGrpSpPr>
+      <p:grpSpPr>
+        <a:xfrm>
+          <a:off x="0" y="0"/>
+          <a:ext cx="0" cy="0"/>
+          <a:chOff x="0" y="0"/>
+          <a:chExt cx="0" cy="0"/>
+        </a:xfrm>
+      </p:grpSpPr>
+      <p:sp>
+        <p:nvSpPr>
+          <p:cNvPr id="2" name="Slide Image Placeholder 1"/>
+          <p:cNvSpPr>
+            <a:spLocks noGrp="1"/>
+          </p:cNvSpPr>
+          <p:nvPr>
+            <p:ph type="sldImg" idx="2"/>
+          </p:nvPr>
+        </p:nvSpPr>
+        <p:spPr/>
+      </p:sp>
+      <p:sp>
+        <p:nvSpPr>
+          <p:cNvPr id="3" name="Notes Placeholder 2"/>
+          <p:cNvSpPr>
+            <a:spLocks noGrp="1"/>
+          </p:cNvSpPr>
+          <p:nvPr>
+            <p:ph type="body" idx="3" sz="quarter"/>
+          </p:nvPr>
+        </p:nvSpPr>
+        <p:spPr/>
+        <p:txBody>
+          <a:bodyPr/>
+          <a:lstStyle/>
+          <a:p>
+            <a:r>
+              <a:t>Setting: six retail transactions in CSV</a:t>
+            </a:r>
+          </a:p>
+          <a:p>
+            <a:r>
+              <a:t>Key idea: each row is one sale; columns describe it</a:t>
+            </a:r>
+          </a:p>
+        </p:txBody>
+      </p:sp>
+      <p:sp>
+        <p:nvSpPr>
+          <p:cNvPr id="4" name="Slide Number Placeholder 3"/>
+          <p:cNvSpPr>
+            <a:spLocks noGrp="1"/>
+          </p:cNvSpPr>
+          <p:nvPr>
+            <p:ph type="sldNum" idx="5" sz="quarter"/>
+          </p:nvPr>
+        </p:nvSpPr>
+        <p:spPr/>
+      </p:sp>
+    </p:spTree>
+  </p:cSld>
+  <p:clrMapOvr>
+    <a:masterClrMapping/>
+  </p:clrMapOvr>
+</p:notes>
+</file>
+
+<file path=ppt/notesSlides/notesSlide2.xml><?xml version="1.0" encoding="utf-8"?>
+<p:notes xmlns:a="http://schemas.openxmlformats.org/drawingml/2006/main" xmlns:p="http://schemas.openxmlformats.org/presentationml/2006/main" xmlns:r="http://schemas.openxmlformats.org/officeDocument/2006/relationships">
+  <p:cSld>
+    <p:spTree>
+      <p:nvGrpSpPr>
+        <p:cNvPr id="1" name=""/>
+        <p:cNvGrpSpPr/>
+        <p:nvPr/>
+      </p:nvGrpSpPr>
+      <p:grpSpPr>
+        <a:xfrm>
+          <a:off x="0" y="0"/>
+          <a:ext cx="0" cy="0"/>
+          <a:chOff x="0" y="0"/>
+          <a:chExt cx="0" cy="0"/>
+        </a:xfrm>
+      </p:grpSpPr>
+      <p:sp>
+        <p:nvSpPr>
+          <p:cNvPr id="2" name="Slide Image Placeholder 1"/>
+          <p:cNvSpPr>
+            <a:spLocks noGrp="1"/>
+          </p:cNvSpPr>
+          <p:nvPr>
+            <p:ph type="sldImg" idx="2"/>
+          </p:nvPr>
+        </p:nvSpPr>
+        <p:spPr/>
+      </p:sp>
+      <p:sp>
+        <p:nvSpPr>
+          <p:cNvPr id="3" name="Notes Placeholder 2"/>
+          <p:cNvSpPr>
+            <a:spLocks noGrp="1"/>
+          </p:cNvSpPr>
+          <p:nvPr>
+            <p:ph type="body" idx="3" sz="quarter"/>
+          </p:nvPr>
+        </p:nvSpPr>
+        <p:spPr/>
+        <p:txBody>
+          <a:bodyPr/>
+          <a:lstStyle/>
+          <a:p>
+            <a:r>
+              <a:t>Setting: nested property listings (semi-structured)</a:t>
+            </a:r>
+          </a:p>
+          <a:p>
+            <a:r>
+              <a:t>Key idea: records need not be flat tables</a:t>
+            </a:r>
+          </a:p>
+          <a:p>
+            <a:r>
+              <a:t>Same goal: meaningful, interpretable data for analysis</a:t>
+            </a:r>
+          </a:p>
+        </p:txBody>
+      </p:sp>
+      <p:sp>
+        <p:nvSpPr>
+          <p:cNvPr id="4" name="Slide Number Placeholder 3"/>
+          <p:cNvSpPr>
+            <a:spLocks noGrp="1"/>
+          </p:cNvSpPr>
+          <p:nvPr>
+            <p:ph type="sldNum" idx="5" sz="quarter"/>
+          </p:nvPr>
+        </p:nvSpPr>
+        <p:spPr/>
+      </p:sp>
+    </p:spTree>
+  </p:cSld>
+  <p:clrMapOvr>
+    <a:masterClrMapping/>
+  </p:clrMapOvr>
+</p:notes>
 </file>
 
 <file path=ppt/slideLayouts/slideLayout1.xml><?xml version="1.0" encoding="utf-8"?>
@@ -3103,8 +3607,8 @@
         </p:nvSpPr>
         <p:spPr>
           <a:xfrm>
-            <a:off x="548640" y="320040"/>
-            <a:ext cx="11064240" cy="914400"/>
+            <a:off x="548640" y="1828800"/>
+            <a:ext cx="11064240" cy="2743200"/>
           </a:xfrm>
           <a:prstGeom prst="rect">
             <a:avLst/>
@@ -3112,16 +3616,46 @@
           <a:noFill/>
         </p:spPr>
         <p:txBody>
-          <a:bodyPr wrap="none">
-            <a:spAutoFit/>
+          <a:bodyPr wrap="square">
+            <a:noAutofit/>
           </a:bodyPr>
           <a:lstStyle/>
           <a:p>
-            <a:pPr>
-              <a:defRPr sz="3200" b="1"/>
+            <a:pPr algn="ctr">
+              <a:lnSpc>
+                <a:spcPts val="2200"/>
+              </a:lnSpc>
+              <a:spcAft>
+                <a:spcPts val="400"/>
+              </a:spcAft>
             </a:pPr>
             <a:r>
+              <a:rPr sz="4000" b="1">
+                <a:solidFill>
+                  <a:srgbClr val="1A1A2E"/>
+                </a:solidFill>
+                <a:latin typeface="Calibri"/>
+              </a:rPr>
               <a:t>Chapter 1 — Introduction to datasets</a:t>
+            </a:r>
+          </a:p>
+          <a:p>
+            <a:pPr algn="ctr">
+              <a:lnSpc>
+                <a:spcPts val="2200"/>
+              </a:lnSpc>
+              <a:spcBef>
+                <a:spcPts val="1400"/>
+              </a:spcBef>
+            </a:pPr>
+            <a:r>
+              <a:rPr sz="2600" b="0">
+                <a:solidFill>
+                  <a:srgbClr val="333333"/>
+                </a:solidFill>
+                <a:latin typeface="Calibri"/>
+              </a:rPr>
+              <a:t>Define a dataset as curated records and attributes prepared for a purpose</a:t>
             </a:r>
           </a:p>
         </p:txBody>
@@ -3134,8 +3668,8 @@
         </p:nvSpPr>
         <p:spPr>
           <a:xfrm>
-            <a:off x="731520" y="1280160"/>
-            <a:ext cx="10515600" cy="5029200"/>
+            <a:off x="548640" y="6355080"/>
+            <a:ext cx="11064240" cy="320040"/>
           </a:xfrm>
           <a:prstGeom prst="rect">
             <a:avLst/>
@@ -3144,15 +3678,23 @@
         </p:spPr>
         <p:txBody>
           <a:bodyPr wrap="square">
-            <a:spAutoFit/>
+            <a:noAutofit/>
           </a:bodyPr>
           <a:lstStyle/>
           <a:p>
-            <a:pPr>
-              <a:defRPr sz="2000"/>
+            <a:pPr algn="r">
+              <a:lnSpc>
+                <a:spcPts val="2200"/>
+              </a:lnSpc>
+              <a:defRPr sz="1000" b="0">
+                <a:solidFill>
+                  <a:srgbClr val="666666"/>
+                </a:solidFill>
+                <a:latin typeface="Calibri"/>
+              </a:defRPr>
             </a:pPr>
             <a:r>
-              <a:t>Define a dataset as curated records and attributes prepared for a purpose</a:t>
+              <a:t>Chapter 1 — Introduction To Datasets</a:t>
             </a:r>
           </a:p>
         </p:txBody>
@@ -3183,8 +3725,8 @@
         </p:nvSpPr>
         <p:spPr>
           <a:xfrm>
-            <a:off x="548640" y="320040"/>
-            <a:ext cx="11064240" cy="914400"/>
+            <a:off x="548640" y="411480"/>
+            <a:ext cx="11064240" cy="777240"/>
           </a:xfrm>
           <a:prstGeom prst="rect">
             <a:avLst/>
@@ -3192,15 +3734,23 @@
           <a:noFill/>
         </p:spPr>
         <p:txBody>
-          <a:bodyPr wrap="none">
-            <a:spAutoFit/>
+          <a:bodyPr wrap="square">
+            <a:noAutofit/>
           </a:bodyPr>
           <a:lstStyle/>
           <a:p>
             <a:pPr>
-              <a:defRPr sz="3200" b="1"/>
+              <a:lnSpc>
+                <a:spcPts val="2200"/>
+              </a:lnSpc>
             </a:pPr>
             <a:r>
+              <a:rPr sz="2800" b="1">
+                <a:solidFill>
+                  <a:srgbClr val="1A1A2E"/>
+                </a:solidFill>
+                <a:latin typeface="Calibri"/>
+              </a:rPr>
               <a:t>Learning objectives</a:t>
             </a:r>
           </a:p>
@@ -3214,8 +3764,8 @@
         </p:nvSpPr>
         <p:spPr>
           <a:xfrm>
-            <a:off x="731520" y="1280160"/>
-            <a:ext cx="10515600" cy="5029200"/>
+            <a:off x="548640" y="1234440"/>
+            <a:ext cx="11064240" cy="4937760"/>
           </a:xfrm>
           <a:prstGeom prst="rect">
             <a:avLst/>
@@ -3224,31 +3774,103 @@
         </p:spPr>
         <p:txBody>
           <a:bodyPr wrap="square">
-            <a:spAutoFit/>
+            <a:noAutofit/>
           </a:bodyPr>
           <a:lstStyle/>
           <a:p>
             <a:pPr>
-              <a:defRPr sz="2000"/>
+              <a:lnSpc>
+                <a:spcPts val="2200"/>
+              </a:lnSpc>
+              <a:spcAft>
+                <a:spcPts val="1000"/>
+              </a:spcAft>
             </a:pPr>
             <a:r>
-              <a:t>Define what counts as a dataset (vs raw logs)</a:t>
+              <a:rPr sz="2000" b="0">
+                <a:solidFill>
+                  <a:srgbClr val="333333"/>
+                </a:solidFill>
+                <a:latin typeface="Calibri"/>
+              </a:rPr>
+              <a:t>• Define what counts as a dataset (vs raw logs)</a:t>
             </a:r>
           </a:p>
           <a:p>
             <a:pPr>
-              <a:defRPr sz="2000"/>
+              <a:lnSpc>
+                <a:spcPts val="2200"/>
+              </a:lnSpc>
+              <a:spcAft>
+                <a:spcPts val="1000"/>
+              </a:spcAft>
             </a:pPr>
             <a:r>
-              <a:t>Distinguish records (rows) from attributes (columns)</a:t>
+              <a:rPr sz="2000" b="0">
+                <a:solidFill>
+                  <a:srgbClr val="333333"/>
+                </a:solidFill>
+                <a:latin typeface="Calibri"/>
+              </a:rPr>
+              <a:t>• Distinguish records (rows) from attributes (columns)</a:t>
             </a:r>
           </a:p>
           <a:p>
             <a:pPr>
-              <a:defRPr sz="2000"/>
+              <a:lnSpc>
+                <a:spcPts val="2200"/>
+              </a:lnSpc>
+              <a:spcAft>
+                <a:spcPts val="1000"/>
+              </a:spcAft>
             </a:pPr>
             <a:r>
-              <a:t>Recognize the same idea in CSV and JSON forms</a:t>
+              <a:rPr sz="2000" b="0">
+                <a:solidFill>
+                  <a:srgbClr val="333333"/>
+                </a:solidFill>
+                <a:latin typeface="Calibri"/>
+              </a:rPr>
+              <a:t>• Recognize the same idea in CSV and JSON forms</a:t>
+            </a:r>
+          </a:p>
+        </p:txBody>
+      </p:sp>
+      <p:sp>
+        <p:nvSpPr>
+          <p:cNvPr id="4" name="TextBox 3"/>
+          <p:cNvSpPr txBox="1"/>
+          <p:nvPr/>
+        </p:nvSpPr>
+        <p:spPr>
+          <a:xfrm>
+            <a:off x="548640" y="6355080"/>
+            <a:ext cx="11064240" cy="320040"/>
+          </a:xfrm>
+          <a:prstGeom prst="rect">
+            <a:avLst/>
+          </a:prstGeom>
+          <a:noFill/>
+        </p:spPr>
+        <p:txBody>
+          <a:bodyPr wrap="square">
+            <a:noAutofit/>
+          </a:bodyPr>
+          <a:lstStyle/>
+          <a:p>
+            <a:pPr algn="r">
+              <a:lnSpc>
+                <a:spcPts val="2200"/>
+              </a:lnSpc>
+              <a:defRPr sz="1000" b="0">
+                <a:solidFill>
+                  <a:srgbClr val="666666"/>
+                </a:solidFill>
+                <a:latin typeface="Calibri"/>
+              </a:defRPr>
+            </a:pPr>
+            <a:r>
+              <a:t>Chapter 1 — Introduction To Datasets</a:t>
             </a:r>
           </a:p>
         </p:txBody>
@@ -3279,8 +3901,8 @@
         </p:nvSpPr>
         <p:spPr>
           <a:xfrm>
-            <a:off x="548640" y="320040"/>
-            <a:ext cx="11064240" cy="914400"/>
+            <a:off x="548640" y="411480"/>
+            <a:ext cx="11064240" cy="777240"/>
           </a:xfrm>
           <a:prstGeom prst="rect">
             <a:avLst/>
@@ -3288,15 +3910,23 @@
           <a:noFill/>
         </p:spPr>
         <p:txBody>
-          <a:bodyPr wrap="none">
-            <a:spAutoFit/>
+          <a:bodyPr wrap="square">
+            <a:noAutofit/>
           </a:bodyPr>
           <a:lstStyle/>
           <a:p>
             <a:pPr>
-              <a:defRPr sz="3200" b="1"/>
+              <a:lnSpc>
+                <a:spcPts val="2200"/>
+              </a:lnSpc>
             </a:pPr>
             <a:r>
+              <a:rPr sz="2800" b="1">
+                <a:solidFill>
+                  <a:srgbClr val="1A1A2E"/>
+                </a:solidFill>
+                <a:latin typeface="Calibri"/>
+              </a:rPr>
               <a:t>What is a dataset?</a:t>
             </a:r>
           </a:p>
@@ -3310,8 +3940,8 @@
         </p:nvSpPr>
         <p:spPr>
           <a:xfrm>
-            <a:off x="731520" y="1280160"/>
-            <a:ext cx="10515600" cy="5029200"/>
+            <a:off x="548640" y="1234440"/>
+            <a:ext cx="11064240" cy="4937760"/>
           </a:xfrm>
           <a:prstGeom prst="rect">
             <a:avLst/>
@@ -3320,39 +3950,160 @@
         </p:spPr>
         <p:txBody>
           <a:bodyPr wrap="square">
-            <a:spAutoFit/>
+            <a:noAutofit/>
           </a:bodyPr>
           <a:lstStyle/>
           <a:p>
             <a:pPr>
-              <a:defRPr sz="2000"/>
+              <a:lnSpc>
+                <a:spcPts val="2200"/>
+              </a:lnSpc>
+              <a:spcAft>
+                <a:spcPts val="1000"/>
+              </a:spcAft>
             </a:pPr>
             <a:r>
-              <a:t>Curated collection of data for analysis or decisions</a:t>
+              <a:rPr sz="2000" b="0">
+                <a:solidFill>
+                  <a:srgbClr val="333333"/>
+                </a:solidFill>
+                <a:latin typeface="Calibri"/>
+              </a:rPr>
+              <a:t>• Curated collection of data for analysis or decisions</a:t>
             </a:r>
           </a:p>
           <a:p>
             <a:pPr>
-              <a:defRPr sz="2000"/>
+              <a:lnSpc>
+                <a:spcPts val="2200"/>
+              </a:lnSpc>
+              <a:spcAft>
+                <a:spcPts val="1000"/>
+              </a:spcAft>
             </a:pPr>
             <a:r>
-              <a:t>Typically organized as records and attributes</a:t>
+              <a:rPr sz="2000" b="0">
+                <a:solidFill>
+                  <a:srgbClr val="333333"/>
+                </a:solidFill>
+                <a:latin typeface="Calibri"/>
+              </a:rPr>
+              <a:t>• Typically organized as records and attributes</a:t>
             </a:r>
           </a:p>
           <a:p>
             <a:pPr>
-              <a:defRPr sz="2000"/>
+              <a:lnSpc>
+                <a:spcPts val="2200"/>
+              </a:lnSpc>
+              <a:spcAft>
+                <a:spcPts val="1000"/>
+              </a:spcAft>
             </a:pPr>
             <a:r>
-              <a:t>Prepared for a purpose: scope, structure, documentation</a:t>
+              <a:rPr sz="2000" b="0">
+                <a:solidFill>
+                  <a:srgbClr val="333333"/>
+                </a:solidFill>
+                <a:latin typeface="Calibri"/>
+              </a:rPr>
+              <a:t>• Prepared for a purpose: scope, structure,</a:t>
             </a:r>
           </a:p>
           <a:p>
             <a:pPr>
-              <a:defRPr sz="2000"/>
+              <a:lnSpc>
+                <a:spcPts val="2200"/>
+              </a:lnSpc>
+              <a:spcAft>
+                <a:spcPts val="1000"/>
+              </a:spcAft>
             </a:pPr>
             <a:r>
-              <a:t>Basic unit for ML, statistics, and business intelligence</a:t>
+              <a:rPr sz="2000" b="0">
+                <a:solidFill>
+                  <a:srgbClr val="333333"/>
+                </a:solidFill>
+                <a:latin typeface="Calibri"/>
+              </a:rPr>
+              <a:t>      documentation</a:t>
+            </a:r>
+          </a:p>
+          <a:p>
+            <a:pPr>
+              <a:lnSpc>
+                <a:spcPts val="2200"/>
+              </a:lnSpc>
+              <a:spcAft>
+                <a:spcPts val="1000"/>
+              </a:spcAft>
+            </a:pPr>
+            <a:r>
+              <a:rPr sz="2000" b="0">
+                <a:solidFill>
+                  <a:srgbClr val="333333"/>
+                </a:solidFill>
+                <a:latin typeface="Calibri"/>
+              </a:rPr>
+              <a:t>• Basic unit for ML, statistics, and business</a:t>
+            </a:r>
+          </a:p>
+          <a:p>
+            <a:pPr>
+              <a:lnSpc>
+                <a:spcPts val="2200"/>
+              </a:lnSpc>
+              <a:spcAft>
+                <a:spcPts val="1000"/>
+              </a:spcAft>
+            </a:pPr>
+            <a:r>
+              <a:rPr sz="2000" b="0">
+                <a:solidFill>
+                  <a:srgbClr val="333333"/>
+                </a:solidFill>
+                <a:latin typeface="Calibri"/>
+              </a:rPr>
+              <a:t>      intelligence</a:t>
+            </a:r>
+          </a:p>
+        </p:txBody>
+      </p:sp>
+      <p:sp>
+        <p:nvSpPr>
+          <p:cNvPr id="4" name="TextBox 3"/>
+          <p:cNvSpPr txBox="1"/>
+          <p:nvPr/>
+        </p:nvSpPr>
+        <p:spPr>
+          <a:xfrm>
+            <a:off x="548640" y="6355080"/>
+            <a:ext cx="11064240" cy="320040"/>
+          </a:xfrm>
+          <a:prstGeom prst="rect">
+            <a:avLst/>
+          </a:prstGeom>
+          <a:noFill/>
+        </p:spPr>
+        <p:txBody>
+          <a:bodyPr wrap="square">
+            <a:noAutofit/>
+          </a:bodyPr>
+          <a:lstStyle/>
+          <a:p>
+            <a:pPr algn="r">
+              <a:lnSpc>
+                <a:spcPts val="2200"/>
+              </a:lnSpc>
+              <a:defRPr sz="1000" b="0">
+                <a:solidFill>
+                  <a:srgbClr val="666666"/>
+                </a:solidFill>
+                <a:latin typeface="Calibri"/>
+              </a:defRPr>
+            </a:pPr>
+            <a:r>
+              <a:t>Chapter 1 — Introduction To Datasets</a:t>
             </a:r>
           </a:p>
         </p:txBody>
@@ -3383,8 +4134,8 @@
         </p:nvSpPr>
         <p:spPr>
           <a:xfrm>
-            <a:off x="548640" y="320040"/>
-            <a:ext cx="11064240" cy="914400"/>
+            <a:off x="548640" y="411480"/>
+            <a:ext cx="11064240" cy="777240"/>
           </a:xfrm>
           <a:prstGeom prst="rect">
             <a:avLst/>
@@ -3392,15 +4143,23 @@
           <a:noFill/>
         </p:spPr>
         <p:txBody>
-          <a:bodyPr wrap="none">
-            <a:spAutoFit/>
+          <a:bodyPr wrap="square">
+            <a:noAutofit/>
           </a:bodyPr>
           <a:lstStyle/>
           <a:p>
             <a:pPr>
-              <a:defRPr sz="3200" b="1"/>
+              <a:lnSpc>
+                <a:spcPts val="2200"/>
+              </a:lnSpc>
             </a:pPr>
             <a:r>
+              <a:rPr sz="2800" b="1">
+                <a:solidFill>
+                  <a:srgbClr val="1A1A2E"/>
+                </a:solidFill>
+                <a:latin typeface="Calibri"/>
+              </a:rPr>
               <a:t>Records and attributes</a:t>
             </a:r>
           </a:p>
@@ -3414,8 +4173,8 @@
         </p:nvSpPr>
         <p:spPr>
           <a:xfrm>
-            <a:off x="731520" y="1280160"/>
-            <a:ext cx="10515600" cy="5029200"/>
+            <a:off x="548640" y="1234440"/>
+            <a:ext cx="11064240" cy="4937760"/>
           </a:xfrm>
           <a:prstGeom prst="rect">
             <a:avLst/>
@@ -3424,39 +4183,215 @@
         </p:spPr>
         <p:txBody>
           <a:bodyPr wrap="square">
-            <a:spAutoFit/>
+            <a:noAutofit/>
           </a:bodyPr>
           <a:lstStyle/>
           <a:p>
             <a:pPr>
-              <a:defRPr sz="2000"/>
+              <a:lnSpc>
+                <a:spcPts val="2200"/>
+              </a:lnSpc>
+              <a:spcAft>
+                <a:spcPts val="1000"/>
+              </a:spcAft>
             </a:pPr>
             <a:r>
-              <a:t>**Record** — one observation (row, instance)</a:t>
+              <a:rPr sz="2000" b="0">
+                <a:solidFill>
+                  <a:srgbClr val="333333"/>
+                </a:solidFill>
+                <a:latin typeface="Calibri"/>
+              </a:rPr>
+              <a:t>• </a:t>
+            </a:r>
+            <a:r>
+              <a:rPr sz="2000" b="1">
+                <a:solidFill>
+                  <a:srgbClr val="333333"/>
+                </a:solidFill>
+                <a:latin typeface="Calibri"/>
+              </a:rPr>
+              <a:t>Record</a:t>
+            </a:r>
+            <a:r>
+              <a:rPr sz="2000" b="0">
+                <a:solidFill>
+                  <a:srgbClr val="333333"/>
+                </a:solidFill>
+                <a:latin typeface="Calibri"/>
+              </a:rPr>
+              <a:t> — one observation (row, instance)</a:t>
             </a:r>
           </a:p>
           <a:p>
             <a:pPr>
-              <a:defRPr sz="2000"/>
+              <a:lnSpc>
+                <a:spcPts val="2200"/>
+              </a:lnSpc>
+              <a:spcAft>
+                <a:spcPts val="1000"/>
+              </a:spcAft>
             </a:pPr>
             <a:r>
-              <a:t>**Attribute** — one property of that observation (column, field)</a:t>
+              <a:rPr sz="2000" b="0">
+                <a:solidFill>
+                  <a:srgbClr val="333333"/>
+                </a:solidFill>
+                <a:latin typeface="Calibri"/>
+              </a:rPr>
+              <a:t>• </a:t>
+            </a:r>
+            <a:r>
+              <a:rPr sz="2000" b="1">
+                <a:solidFill>
+                  <a:srgbClr val="333333"/>
+                </a:solidFill>
+                <a:latin typeface="Calibri"/>
+              </a:rPr>
+              <a:t>Attribute</a:t>
+            </a:r>
+            <a:r>
+              <a:rPr sz="2000" b="0">
+                <a:solidFill>
+                  <a:srgbClr val="333333"/>
+                </a:solidFill>
+                <a:latin typeface="Calibri"/>
+              </a:rPr>
+              <a:t> — one property of that observation</a:t>
             </a:r>
           </a:p>
           <a:p>
             <a:pPr>
-              <a:defRPr sz="2000"/>
+              <a:lnSpc>
+                <a:spcPts val="2200"/>
+              </a:lnSpc>
+              <a:spcAft>
+                <a:spcPts val="1000"/>
+              </a:spcAft>
             </a:pPr>
             <a:r>
-              <a:t>Sales example: one sale = one record; Date, Product, Price = attributes</a:t>
+              <a:rPr sz="2000" b="0">
+                <a:solidFill>
+                  <a:srgbClr val="333333"/>
+                </a:solidFill>
+                <a:latin typeface="Calibri"/>
+              </a:rPr>
+              <a:t>      (column, field)</a:t>
             </a:r>
           </a:p>
           <a:p>
             <a:pPr>
-              <a:defRPr sz="2000"/>
+              <a:lnSpc>
+                <a:spcPts val="2200"/>
+              </a:lnSpc>
+              <a:spcAft>
+                <a:spcPts val="1000"/>
+              </a:spcAft>
             </a:pPr>
             <a:r>
-              <a:t>Same pattern in healthcare, sensors, and other domains</a:t>
+              <a:rPr sz="2000" b="0">
+                <a:solidFill>
+                  <a:srgbClr val="333333"/>
+                </a:solidFill>
+                <a:latin typeface="Calibri"/>
+              </a:rPr>
+              <a:t>• Sales example: one sale = one record; Date, Product,</a:t>
+            </a:r>
+          </a:p>
+          <a:p>
+            <a:pPr>
+              <a:lnSpc>
+                <a:spcPts val="2200"/>
+              </a:lnSpc>
+              <a:spcAft>
+                <a:spcPts val="1000"/>
+              </a:spcAft>
+            </a:pPr>
+            <a:r>
+              <a:rPr sz="2000" b="0">
+                <a:solidFill>
+                  <a:srgbClr val="333333"/>
+                </a:solidFill>
+                <a:latin typeface="Calibri"/>
+              </a:rPr>
+              <a:t>      Price = attributes</a:t>
+            </a:r>
+          </a:p>
+          <a:p>
+            <a:pPr>
+              <a:lnSpc>
+                <a:spcPts val="2200"/>
+              </a:lnSpc>
+              <a:spcAft>
+                <a:spcPts val="1000"/>
+              </a:spcAft>
+            </a:pPr>
+            <a:r>
+              <a:rPr sz="2000" b="0">
+                <a:solidFill>
+                  <a:srgbClr val="333333"/>
+                </a:solidFill>
+                <a:latin typeface="Calibri"/>
+              </a:rPr>
+              <a:t>• Same pattern in healthcare, sensors, and other</a:t>
+            </a:r>
+          </a:p>
+          <a:p>
+            <a:pPr>
+              <a:lnSpc>
+                <a:spcPts val="2200"/>
+              </a:lnSpc>
+              <a:spcAft>
+                <a:spcPts val="1000"/>
+              </a:spcAft>
+            </a:pPr>
+            <a:r>
+              <a:rPr sz="2000" b="0">
+                <a:solidFill>
+                  <a:srgbClr val="333333"/>
+                </a:solidFill>
+                <a:latin typeface="Calibri"/>
+              </a:rPr>
+              <a:t>      domains</a:t>
+            </a:r>
+          </a:p>
+        </p:txBody>
+      </p:sp>
+      <p:sp>
+        <p:nvSpPr>
+          <p:cNvPr id="4" name="TextBox 3"/>
+          <p:cNvSpPr txBox="1"/>
+          <p:nvPr/>
+        </p:nvSpPr>
+        <p:spPr>
+          <a:xfrm>
+            <a:off x="548640" y="6355080"/>
+            <a:ext cx="11064240" cy="320040"/>
+          </a:xfrm>
+          <a:prstGeom prst="rect">
+            <a:avLst/>
+          </a:prstGeom>
+          <a:noFill/>
+        </p:spPr>
+        <p:txBody>
+          <a:bodyPr wrap="square">
+            <a:noAutofit/>
+          </a:bodyPr>
+          <a:lstStyle/>
+          <a:p>
+            <a:pPr algn="r">
+              <a:lnSpc>
+                <a:spcPts val="2200"/>
+              </a:lnSpc>
+              <a:defRPr sz="1000" b="0">
+                <a:solidFill>
+                  <a:srgbClr val="666666"/>
+                </a:solidFill>
+                <a:latin typeface="Calibri"/>
+              </a:defRPr>
+            </a:pPr>
+            <a:r>
+              <a:t>Chapter 1 — Introduction To Datasets</a:t>
             </a:r>
           </a:p>
         </p:txBody>
@@ -3487,8 +4422,8 @@
         </p:nvSpPr>
         <p:spPr>
           <a:xfrm>
-            <a:off x="548640" y="320040"/>
-            <a:ext cx="11064240" cy="914400"/>
+            <a:off x="548640" y="411480"/>
+            <a:ext cx="11064240" cy="777240"/>
           </a:xfrm>
           <a:prstGeom prst="rect">
             <a:avLst/>
@@ -3496,15 +4431,23 @@
           <a:noFill/>
         </p:spPr>
         <p:txBody>
-          <a:bodyPr wrap="none">
-            <a:spAutoFit/>
+          <a:bodyPr wrap="square">
+            <a:noAutofit/>
           </a:bodyPr>
           <a:lstStyle/>
           <a:p>
             <a:pPr>
-              <a:defRPr sz="3200" b="1"/>
+              <a:lnSpc>
+                <a:spcPts val="2200"/>
+              </a:lnSpc>
             </a:pPr>
             <a:r>
+              <a:rPr sz="2800" b="1">
+                <a:solidFill>
+                  <a:srgbClr val="1A1A2E"/>
+                </a:solidFill>
+                <a:latin typeface="Calibri"/>
+              </a:rPr>
               <a:t>Example 1.1 — Sample CSV sales data</a:t>
             </a:r>
           </a:p>
@@ -3518,8 +4461,52 @@
         </p:nvSpPr>
         <p:spPr>
           <a:xfrm>
-            <a:off x="731520" y="1280160"/>
-            <a:ext cx="10515600" cy="5029200"/>
+            <a:off x="548640" y="1051560"/>
+            <a:ext cx="11064240" cy="914400"/>
+          </a:xfrm>
+          <a:prstGeom prst="rect">
+            <a:avLst/>
+          </a:prstGeom>
+          <a:solidFill>
+            <a:srgbClr val="F4F4F4"/>
+          </a:solidFill>
+        </p:spPr>
+        <p:txBody>
+          <a:bodyPr wrap="square">
+            <a:noAutofit/>
+          </a:bodyPr>
+          <a:lstStyle/>
+          <a:p>
+            <a:pPr>
+              <a:lnSpc>
+                <a:spcPts val="2200"/>
+              </a:lnSpc>
+              <a:spcAft>
+                <a:spcPts val="200"/>
+              </a:spcAft>
+            </a:pPr>
+            <a:r>
+              <a:rPr sz="2000" b="0">
+                <a:solidFill>
+                  <a:srgbClr val="333333"/>
+                </a:solidFill>
+                <a:latin typeface="Consolas"/>
+              </a:rPr>
+              <a:t>$ cd modules/chapter1/example1/ &amp;&amp; bash run.sh</a:t>
+            </a:r>
+          </a:p>
+        </p:txBody>
+      </p:sp>
+      <p:sp>
+        <p:nvSpPr>
+          <p:cNvPr id="4" name="TextBox 3"/>
+          <p:cNvSpPr txBox="1"/>
+          <p:nvPr/>
+        </p:nvSpPr>
+        <p:spPr>
+          <a:xfrm>
+            <a:off x="548640" y="6355080"/>
+            <a:ext cx="11064240" cy="320040"/>
           </a:xfrm>
           <a:prstGeom prst="rect">
             <a:avLst/>
@@ -3528,31 +4515,23 @@
         </p:spPr>
         <p:txBody>
           <a:bodyPr wrap="square">
-            <a:spAutoFit/>
+            <a:noAutofit/>
           </a:bodyPr>
           <a:lstStyle/>
           <a:p>
-            <a:pPr>
-              <a:defRPr sz="2000"/>
+            <a:pPr algn="r">
+              <a:lnSpc>
+                <a:spcPts val="2200"/>
+              </a:lnSpc>
+              <a:defRPr sz="1000" b="0">
+                <a:solidFill>
+                  <a:srgbClr val="666666"/>
+                </a:solidFill>
+                <a:latin typeface="Calibri"/>
+              </a:defRPr>
             </a:pPr>
             <a:r>
-              <a:t>Setting: six retail transactions in CSV</a:t>
-            </a:r>
-          </a:p>
-          <a:p>
-            <a:pPr>
-              <a:defRPr sz="2000"/>
-            </a:pPr>
-            <a:r>
-              <a:t>Key idea: each row is one sale; columns describe it</a:t>
-            </a:r>
-          </a:p>
-          <a:p>
-            <a:pPr>
-              <a:defRPr sz="2000"/>
-            </a:pPr>
-            <a:r>
-              <a:t>Try it: `modules/chapter1/example1/`</a:t>
+              <a:t>Chapter 1 — Introduction To Datasets</a:t>
             </a:r>
           </a:p>
         </p:txBody>
@@ -3583,8 +4562,8 @@
         </p:nvSpPr>
         <p:spPr>
           <a:xfrm>
-            <a:off x="548640" y="320040"/>
-            <a:ext cx="11064240" cy="914400"/>
+            <a:off x="548640" y="411480"/>
+            <a:ext cx="11064240" cy="777240"/>
           </a:xfrm>
           <a:prstGeom prst="rect">
             <a:avLst/>
@@ -3592,15 +4571,23 @@
           <a:noFill/>
         </p:spPr>
         <p:txBody>
-          <a:bodyPr wrap="none">
-            <a:spAutoFit/>
+          <a:bodyPr wrap="square">
+            <a:noAutofit/>
           </a:bodyPr>
           <a:lstStyle/>
           <a:p>
             <a:pPr>
-              <a:defRPr sz="3200" b="1"/>
+              <a:lnSpc>
+                <a:spcPts val="2200"/>
+              </a:lnSpc>
             </a:pPr>
             <a:r>
+              <a:rPr sz="2800" b="1">
+                <a:solidFill>
+                  <a:srgbClr val="1A1A2E"/>
+                </a:solidFill>
+                <a:latin typeface="Calibri"/>
+              </a:rPr>
               <a:t>Example 1.4 — Housing prices in JSON</a:t>
             </a:r>
           </a:p>
@@ -3614,8 +4601,52 @@
         </p:nvSpPr>
         <p:spPr>
           <a:xfrm>
-            <a:off x="731520" y="1280160"/>
-            <a:ext cx="10515600" cy="5029200"/>
+            <a:off x="548640" y="1051560"/>
+            <a:ext cx="11064240" cy="914400"/>
+          </a:xfrm>
+          <a:prstGeom prst="rect">
+            <a:avLst/>
+          </a:prstGeom>
+          <a:solidFill>
+            <a:srgbClr val="F4F4F4"/>
+          </a:solidFill>
+        </p:spPr>
+        <p:txBody>
+          <a:bodyPr wrap="square">
+            <a:noAutofit/>
+          </a:bodyPr>
+          <a:lstStyle/>
+          <a:p>
+            <a:pPr>
+              <a:lnSpc>
+                <a:spcPts val="2200"/>
+              </a:lnSpc>
+              <a:spcAft>
+                <a:spcPts val="200"/>
+              </a:spcAft>
+            </a:pPr>
+            <a:r>
+              <a:rPr sz="2000" b="0">
+                <a:solidFill>
+                  <a:srgbClr val="333333"/>
+                </a:solidFill>
+                <a:latin typeface="Consolas"/>
+              </a:rPr>
+              <a:t>$ cd modules/chapter1/example4/ &amp;&amp; bash run.sh</a:t>
+            </a:r>
+          </a:p>
+        </p:txBody>
+      </p:sp>
+      <p:sp>
+        <p:nvSpPr>
+          <p:cNvPr id="4" name="TextBox 3"/>
+          <p:cNvSpPr txBox="1"/>
+          <p:nvPr/>
+        </p:nvSpPr>
+        <p:spPr>
+          <a:xfrm>
+            <a:off x="548640" y="6355080"/>
+            <a:ext cx="11064240" cy="320040"/>
           </a:xfrm>
           <a:prstGeom prst="rect">
             <a:avLst/>
@@ -3624,39 +4655,23 @@
         </p:spPr>
         <p:txBody>
           <a:bodyPr wrap="square">
-            <a:spAutoFit/>
+            <a:noAutofit/>
           </a:bodyPr>
           <a:lstStyle/>
           <a:p>
-            <a:pPr>
-              <a:defRPr sz="2000"/>
+            <a:pPr algn="r">
+              <a:lnSpc>
+                <a:spcPts val="2200"/>
+              </a:lnSpc>
+              <a:defRPr sz="1000" b="0">
+                <a:solidFill>
+                  <a:srgbClr val="666666"/>
+                </a:solidFill>
+                <a:latin typeface="Calibri"/>
+              </a:defRPr>
             </a:pPr>
             <a:r>
-              <a:t>Setting: nested property listings (semi-structured)</a:t>
-            </a:r>
-          </a:p>
-          <a:p>
-            <a:pPr>
-              <a:defRPr sz="2000"/>
-            </a:pPr>
-            <a:r>
-              <a:t>Key idea: records need not be flat tables</a:t>
-            </a:r>
-          </a:p>
-          <a:p>
-            <a:pPr>
-              <a:defRPr sz="2000"/>
-            </a:pPr>
-            <a:r>
-              <a:t>Same goal: meaningful, interpretable data for analysis</a:t>
-            </a:r>
-          </a:p>
-          <a:p>
-            <a:pPr>
-              <a:defRPr sz="2000"/>
-            </a:pPr>
-            <a:r>
-              <a:t>Try it: `modules/chapter1/example4/`</a:t>
+              <a:t>Chapter 1 — Introduction To Datasets</a:t>
             </a:r>
           </a:p>
         </p:txBody>
@@ -3687,8 +4702,8 @@
         </p:nvSpPr>
         <p:spPr>
           <a:xfrm>
-            <a:off x="548640" y="320040"/>
-            <a:ext cx="11064240" cy="914400"/>
+            <a:off x="548640" y="411480"/>
+            <a:ext cx="11064240" cy="777240"/>
           </a:xfrm>
           <a:prstGeom prst="rect">
             <a:avLst/>
@@ -3696,15 +4711,23 @@
           <a:noFill/>
         </p:spPr>
         <p:txBody>
-          <a:bodyPr wrap="none">
-            <a:spAutoFit/>
+          <a:bodyPr wrap="square">
+            <a:noAutofit/>
           </a:bodyPr>
           <a:lstStyle/>
           <a:p>
             <a:pPr>
-              <a:defRPr sz="3200" b="1"/>
+              <a:lnSpc>
+                <a:spcPts val="2200"/>
+              </a:lnSpc>
             </a:pPr>
             <a:r>
+              <a:rPr sz="2800" b="1">
+                <a:solidFill>
+                  <a:srgbClr val="1A1A2E"/>
+                </a:solidFill>
+                <a:latin typeface="Calibri"/>
+              </a:rPr>
               <a:t>Takeaways</a:t>
             </a:r>
           </a:p>
@@ -3718,8 +4741,8 @@
         </p:nvSpPr>
         <p:spPr>
           <a:xfrm>
-            <a:off x="731520" y="1280160"/>
-            <a:ext cx="10515600" cy="5029200"/>
+            <a:off x="548640" y="1234440"/>
+            <a:ext cx="11064240" cy="4937760"/>
           </a:xfrm>
           <a:prstGeom prst="rect">
             <a:avLst/>
@@ -3728,63 +4751,116 @@
         </p:spPr>
         <p:txBody>
           <a:bodyPr wrap="square">
-            <a:spAutoFit/>
+            <a:noAutofit/>
           </a:bodyPr>
           <a:lstStyle/>
           <a:p>
             <a:pPr>
-              <a:defRPr sz="2000"/>
+              <a:lnSpc>
+                <a:spcPts val="2200"/>
+              </a:lnSpc>
+              <a:spcAft>
+                <a:spcPts val="1000"/>
+              </a:spcAft>
             </a:pPr>
             <a:r>
-              <a:t>A dataset is curated for a purpose, not just a dump of bytes</a:t>
+              <a:rPr sz="2000" b="0">
+                <a:solidFill>
+                  <a:srgbClr val="333333"/>
+                </a:solidFill>
+                <a:latin typeface="Calibri"/>
+              </a:rPr>
+              <a:t>• A dataset is curated for a purpose, not just a dump</a:t>
             </a:r>
           </a:p>
           <a:p>
             <a:pPr>
-              <a:defRPr sz="2000"/>
+              <a:lnSpc>
+                <a:spcPts val="2200"/>
+              </a:lnSpc>
+              <a:spcAft>
+                <a:spcPts val="1000"/>
+              </a:spcAft>
             </a:pPr>
             <a:r>
-              <a:t>Records + attributes are the core vocabulary</a:t>
+              <a:rPr sz="2000" b="0">
+                <a:solidFill>
+                  <a:srgbClr val="333333"/>
+                </a:solidFill>
+                <a:latin typeface="Calibri"/>
+              </a:rPr>
+              <a:t>      of bytes</a:t>
             </a:r>
           </a:p>
           <a:p>
             <a:pPr>
-              <a:defRPr sz="2000"/>
+              <a:lnSpc>
+                <a:spcPts val="2200"/>
+              </a:lnSpc>
+              <a:spcAft>
+                <a:spcPts val="1000"/>
+              </a:spcAft>
             </a:pPr>
             <a:r>
-              <a:t>Form varies (CSV, JSON, images, text); the goal stays insight</a:t>
-            </a:r>
-          </a:p>
-        </p:txBody>
-      </p:sp>
-    </p:spTree>
-  </p:cSld>
-  <p:clrMapOvr>
-    <a:masterClrMapping/>
-  </p:clrMapOvr>
-</p:sld>
-</file>
-
-<file path=ppt/slides/slide8.xml><?xml version="1.0" encoding="utf-8"?>
-<p:sld xmlns:a="http://schemas.openxmlformats.org/drawingml/2006/main" xmlns:p="http://schemas.openxmlformats.org/presentationml/2006/main" xmlns:r="http://schemas.openxmlformats.org/officeDocument/2006/relationships">
-  <p:cSld>
-    <p:spTree>
-      <p:nvGrpSpPr>
-        <p:cNvPr id="1" name=""/>
-        <p:cNvGrpSpPr/>
-        <p:nvPr/>
-      </p:nvGrpSpPr>
-      <p:grpSpPr/>
-      <p:sp>
-        <p:nvSpPr>
-          <p:cNvPr id="2" name="TextBox 1"/>
+              <a:rPr sz="2000" b="0">
+                <a:solidFill>
+                  <a:srgbClr val="333333"/>
+                </a:solidFill>
+                <a:latin typeface="Calibri"/>
+              </a:rPr>
+              <a:t>• Records + attributes are the core vocabulary</a:t>
+            </a:r>
+          </a:p>
+          <a:p>
+            <a:pPr>
+              <a:lnSpc>
+                <a:spcPts val="2200"/>
+              </a:lnSpc>
+              <a:spcAft>
+                <a:spcPts val="1000"/>
+              </a:spcAft>
+            </a:pPr>
+            <a:r>
+              <a:rPr sz="2000" b="0">
+                <a:solidFill>
+                  <a:srgbClr val="333333"/>
+                </a:solidFill>
+                <a:latin typeface="Calibri"/>
+              </a:rPr>
+              <a:t>• Form varies (CSV, JSON, images, text); the goal</a:t>
+            </a:r>
+          </a:p>
+          <a:p>
+            <a:pPr>
+              <a:lnSpc>
+                <a:spcPts val="2200"/>
+              </a:lnSpc>
+              <a:spcAft>
+                <a:spcPts val="1000"/>
+              </a:spcAft>
+            </a:pPr>
+            <a:r>
+              <a:rPr sz="2000" b="0">
+                <a:solidFill>
+                  <a:srgbClr val="333333"/>
+                </a:solidFill>
+                <a:latin typeface="Calibri"/>
+              </a:rPr>
+              <a:t>      stays insight</a:t>
+            </a:r>
+          </a:p>
+        </p:txBody>
+      </p:sp>
+      <p:sp>
+        <p:nvSpPr>
+          <p:cNvPr id="4" name="TextBox 3"/>
           <p:cNvSpPr txBox="1"/>
           <p:nvPr/>
         </p:nvSpPr>
         <p:spPr>
           <a:xfrm>
-            <a:off x="548640" y="320040"/>
-            <a:ext cx="11064240" cy="914400"/>
+            <a:off x="548640" y="6355080"/>
+            <a:ext cx="11064240" cy="320040"/>
           </a:xfrm>
           <a:prstGeom prst="rect">
             <a:avLst/>
@@ -3792,55 +4868,24 @@
           <a:noFill/>
         </p:spPr>
         <p:txBody>
-          <a:bodyPr wrap="none">
-            <a:spAutoFit/>
+          <a:bodyPr wrap="square">
+            <a:noAutofit/>
           </a:bodyPr>
           <a:lstStyle/>
           <a:p>
-            <a:pPr>
-              <a:defRPr sz="3200" b="1"/>
+            <a:pPr algn="r">
+              <a:lnSpc>
+                <a:spcPts val="2200"/>
+              </a:lnSpc>
+              <a:defRPr sz="1000" b="0">
+                <a:solidFill>
+                  <a:srgbClr val="666666"/>
+                </a:solidFill>
+                <a:latin typeface="Calibri"/>
+              </a:defRPr>
             </a:pPr>
             <a:r>
-              <a:t>Next</a:t>
-            </a:r>
-          </a:p>
-        </p:txBody>
-      </p:sp>
-      <p:sp>
-        <p:nvSpPr>
-          <p:cNvPr id="3" name="TextBox 2"/>
-          <p:cNvSpPr txBox="1"/>
-          <p:nvPr/>
-        </p:nvSpPr>
-        <p:spPr>
-          <a:xfrm>
-            <a:off x="731520" y="1280160"/>
-            <a:ext cx="10515600" cy="5029200"/>
-          </a:xfrm>
-          <a:prstGeom prst="rect">
-            <a:avLst/>
-          </a:prstGeom>
-          <a:noFill/>
-        </p:spPr>
-        <p:txBody>
-          <a:bodyPr wrap="square">
-            <a:spAutoFit/>
-          </a:bodyPr>
-          <a:lstStyle/>
-          <a:p>
-            <a:pPr>
-              <a:defRPr sz="2000"/>
-            </a:pPr>
-            <a:r>
-              <a:t>Complete the quiz for this clip</a:t>
-            </a:r>
-          </a:p>
-          <a:p>
-            <a:pPr>
-              <a:defRPr sz="2000"/>
-            </a:pPr>
-            <a:r>
-              <a:t>Then continue to: Types of datasets</a:t>
+              <a:t>Chapter 1 — Introduction To Datasets</a:t>
             </a:r>
           </a:p>
         </p:txBody>
@@ -4171,4 +5216,324 @@
   </a:objectDefaults>
   <a:extraClrSchemeLst/>
 </a:theme>
+</file>
+
+<file path=ppt/theme/theme2.xml><?xml version="1.0" encoding="utf-8"?>
+<a:theme xmlns:a="http://schemas.openxmlformats.org/drawingml/2006/main" name="Office Theme">
+  <a:themeElements>
+    <a:clrScheme name="Office">
+      <a:dk1>
+        <a:sysClr val="windowText" lastClr="000000"/>
+      </a:dk1>
+      <a:lt1>
+        <a:sysClr val="window" lastClr="FFFFFF"/>
+      </a:lt1>
+      <a:dk2>
+        <a:srgbClr val="1F497D"/>
+      </a:dk2>
+      <a:lt2>
+        <a:srgbClr val="EEECE1"/>
+      </a:lt2>
+      <a:accent1>
+        <a:srgbClr val="4F81BD"/>
+      </a:accent1>
+      <a:accent2>
+        <a:srgbClr val="C0504D"/>
+      </a:accent2>
+      <a:accent3>
+        <a:srgbClr val="9BBB59"/>
+      </a:accent3>
+      <a:accent4>
+        <a:srgbClr val="8064A2"/>
+      </a:accent4>
+      <a:accent5>
+        <a:srgbClr val="4BACC6"/>
+      </a:accent5>
+      <a:accent6>
+        <a:srgbClr val="F79646"/>
+      </a:accent6>
+      <a:hlink>
+        <a:srgbClr val="0000FF"/>
+      </a:hlink>
+      <a:folHlink>
+        <a:srgbClr val="800080"/>
+      </a:folHlink>
+    </a:clrScheme>
+    <a:fontScheme name="Office">
+      <a:majorFont>
+        <a:latin typeface="Calibri"/>
+        <a:ea typeface=""/>
+        <a:cs typeface=""/>
+        <a:font script="Jpan" typeface="ＭＳ Ｐゴシック"/>
+        <a:font script="Hang" typeface="맑은 고딕"/>
+        <a:font script="Hans" typeface="宋体"/>
+        <a:font script="Hant" typeface="新細明體"/>
+        <a:font script="Arab" typeface="Times New Roman"/>
+        <a:font script="Hebr" typeface="Times New Roman"/>
+        <a:font script="Thai" typeface="Angsana New"/>
+        <a:font script="Ethi" typeface="Nyala"/>
+        <a:font script="Beng" typeface="Vrinda"/>
+        <a:font script="Gujr" typeface="Shruti"/>
+        <a:font script="Khmr" typeface="MoolBoran"/>
+        <a:font script="Knda" typeface="Tunga"/>
+        <a:font script="Guru" typeface="Raavi"/>
+        <a:font script="Cans" typeface="Euphemia"/>
+        <a:font script="Cher" typeface="Plantagenet Cherokee"/>
+        <a:font script="Yiii" typeface="Microsoft Yi Baiti"/>
+        <a:font script="Tibt" typeface="Microsoft Himalaya"/>
+        <a:font script="Thaa" typeface="MV Boli"/>
+        <a:font script="Deva" typeface="Mangal"/>
+        <a:font script="Telu" typeface="Gautami"/>
+        <a:font script="Taml" typeface="Latha"/>
+        <a:font script="Syrc" typeface="Estrangelo Edessa"/>
+        <a:font script="Orya" typeface="Kalinga"/>
+        <a:font script="Mlym" typeface="Kartika"/>
+        <a:font script="Laoo" typeface="DokChampa"/>
+        <a:font script="Sinh" typeface="Iskoola Pota"/>
+        <a:font script="Mong" typeface="Mongolian Baiti"/>
+        <a:font script="Viet" typeface="Times New Roman"/>
+        <a:font script="Uigh" typeface="Microsoft Uighur"/>
+        <a:font script="Geor" typeface="Sylfaen"/>
+      </a:majorFont>
+      <a:minorFont>
+        <a:latin typeface="Calibri"/>
+        <a:ea typeface=""/>
+        <a:cs typeface=""/>
+        <a:font script="Jpan" typeface="ＭＳ Ｐゴシック"/>
+        <a:font script="Hang" typeface="맑은 고딕"/>
+        <a:font script="Hans" typeface="宋体"/>
+        <a:font script="Hant" typeface="新細明體"/>
+        <a:font script="Arab" typeface="Arial"/>
+        <a:font script="Hebr" typeface="Arial"/>
+        <a:font script="Thai" typeface="Cordia New"/>
+        <a:font script="Ethi" typeface="Nyala"/>
+        <a:font script="Beng" typeface="Vrinda"/>
+        <a:font script="Gujr" typeface="Shruti"/>
+        <a:font script="Khmr" typeface="DaunPenh"/>
+        <a:font script="Knda" typeface="Tunga"/>
+        <a:font script="Guru" typeface="Raavi"/>
+        <a:font script="Cans" typeface="Euphemia"/>
+        <a:font script="Cher" typeface="Plantagenet Cherokee"/>
+        <a:font script="Yiii" typeface="Microsoft Yi Baiti"/>
+        <a:font script="Tibt" typeface="Microsoft Himalaya"/>
+        <a:font script="Thaa" typeface="MV Boli"/>
+        <a:font script="Deva" typeface="Mangal"/>
+        <a:font script="Telu" typeface="Gautami"/>
+        <a:font script="Taml" typeface="Latha"/>
+        <a:font script="Syrc" typeface="Estrangelo Edessa"/>
+        <a:font script="Orya" typeface="Kalinga"/>
+        <a:font script="Mlym" typeface="Kartika"/>
+        <a:font script="Laoo" typeface="DokChampa"/>
+        <a:font script="Sinh" typeface="Iskoola Pota"/>
+        <a:font script="Mong" typeface="Mongolian Baiti"/>
+        <a:font script="Viet" typeface="Arial"/>
+        <a:font script="Uigh" typeface="Microsoft Uighur"/>
+        <a:font script="Geor" typeface="Sylfaen"/>
+      </a:minorFont>
+    </a:fontScheme>
+    <a:fmtScheme name="Office">
+      <a:fillStyleLst>
+        <a:solidFill>
+          <a:schemeClr val="phClr"/>
+        </a:solidFill>
+        <a:gradFill rotWithShape="1">
+          <a:gsLst>
+            <a:gs pos="0">
+              <a:schemeClr val="phClr">
+                <a:tint val="50000"/>
+                <a:satMod val="300000"/>
+              </a:schemeClr>
+            </a:gs>
+            <a:gs pos="35000">
+              <a:schemeClr val="phClr">
+                <a:tint val="37000"/>
+                <a:satMod val="300000"/>
+              </a:schemeClr>
+            </a:gs>
+            <a:gs pos="100000">
+              <a:schemeClr val="phClr">
+                <a:tint val="15000"/>
+                <a:satMod val="350000"/>
+              </a:schemeClr>
+            </a:gs>
+          </a:gsLst>
+          <a:lin ang="16200000" scaled="1"/>
+        </a:gradFill>
+        <a:gradFill rotWithShape="1">
+          <a:gsLst>
+            <a:gs pos="0">
+              <a:schemeClr val="phClr">
+                <a:tint val="100000"/>
+                <a:shade val="100000"/>
+                <a:satMod val="130000"/>
+              </a:schemeClr>
+            </a:gs>
+            <a:gs pos="100000">
+              <a:schemeClr val="phClr">
+                <a:tint val="50000"/>
+                <a:shade val="100000"/>
+                <a:satMod val="350000"/>
+              </a:schemeClr>
+            </a:gs>
+          </a:gsLst>
+          <a:lin ang="16200000" scaled="0"/>
+        </a:gradFill>
+      </a:fillStyleLst>
+      <a:lnStyleLst>
+        <a:ln w="9525" cap="flat" cmpd="sng" algn="ctr">
+          <a:solidFill>
+            <a:schemeClr val="phClr">
+              <a:shade val="95000"/>
+              <a:satMod val="105000"/>
+            </a:schemeClr>
+          </a:solidFill>
+          <a:prstDash val="solid"/>
+        </a:ln>
+        <a:ln w="25400" cap="flat" cmpd="sng" algn="ctr">
+          <a:solidFill>
+            <a:schemeClr val="phClr"/>
+          </a:solidFill>
+          <a:prstDash val="solid"/>
+        </a:ln>
+        <a:ln w="38100" cap="flat" cmpd="sng" algn="ctr">
+          <a:solidFill>
+            <a:schemeClr val="phClr"/>
+          </a:solidFill>
+          <a:prstDash val="solid"/>
+        </a:ln>
+      </a:lnStyleLst>
+      <a:effectStyleLst>
+        <a:effectStyle>
+          <a:effectLst>
+            <a:outerShdw blurRad="40000" dist="20000" dir="5400000" rotWithShape="0">
+              <a:srgbClr val="000000">
+                <a:alpha val="38000"/>
+              </a:srgbClr>
+            </a:outerShdw>
+          </a:effectLst>
+        </a:effectStyle>
+        <a:effectStyle>
+          <a:effectLst>
+            <a:outerShdw blurRad="40000" dist="23000" dir="5400000" rotWithShape="0">
+              <a:srgbClr val="000000">
+                <a:alpha val="35000"/>
+              </a:srgbClr>
+            </a:outerShdw>
+          </a:effectLst>
+        </a:effectStyle>
+        <a:effectStyle>
+          <a:effectLst>
+            <a:outerShdw blurRad="40000" dist="23000" dir="5400000" rotWithShape="0">
+              <a:srgbClr val="000000">
+                <a:alpha val="35000"/>
+              </a:srgbClr>
+            </a:outerShdw>
+          </a:effectLst>
+          <a:scene3d>
+            <a:camera prst="orthographicFront">
+              <a:rot lat="0" lon="0" rev="0"/>
+            </a:camera>
+            <a:lightRig rig="threePt" dir="t">
+              <a:rot lat="0" lon="0" rev="1200000"/>
+            </a:lightRig>
+          </a:scene3d>
+          <a:sp3d>
+            <a:bevelT w="63500" h="25400"/>
+          </a:sp3d>
+        </a:effectStyle>
+      </a:effectStyleLst>
+      <a:bgFillStyleLst>
+        <a:solidFill>
+          <a:schemeClr val="phClr"/>
+        </a:solidFill>
+        <a:gradFill rotWithShape="1">
+          <a:gsLst>
+            <a:gs pos="0">
+              <a:schemeClr val="phClr">
+                <a:tint val="40000"/>
+                <a:satMod val="350000"/>
+              </a:schemeClr>
+            </a:gs>
+            <a:gs pos="40000">
+              <a:schemeClr val="phClr">
+                <a:tint val="45000"/>
+                <a:shade val="99000"/>
+                <a:satMod val="350000"/>
+              </a:schemeClr>
+            </a:gs>
+            <a:gs pos="100000">
+              <a:schemeClr val="phClr">
+                <a:shade val="20000"/>
+                <a:satMod val="255000"/>
+              </a:schemeClr>
+            </a:gs>
+          </a:gsLst>
+          <a:path path="circle">
+            <a:fillToRect l="50000" t="-80000" r="50000" b="180000"/>
+          </a:path>
+        </a:gradFill>
+        <a:gradFill rotWithShape="1">
+          <a:gsLst>
+            <a:gs pos="0">
+              <a:schemeClr val="phClr">
+                <a:tint val="80000"/>
+                <a:satMod val="300000"/>
+              </a:schemeClr>
+            </a:gs>
+            <a:gs pos="100000">
+              <a:schemeClr val="phClr">
+                <a:shade val="30000"/>
+                <a:satMod val="200000"/>
+              </a:schemeClr>
+            </a:gs>
+          </a:gsLst>
+          <a:path path="circle">
+            <a:fillToRect l="50000" t="50000" r="50000" b="50000"/>
+          </a:path>
+        </a:gradFill>
+      </a:bgFillStyleLst>
+    </a:fmtScheme>
+  </a:themeElements>
+  <a:objectDefaults>
+    <a:spDef>
+      <a:spPr/>
+      <a:bodyPr/>
+      <a:lstStyle/>
+      <a:style>
+        <a:lnRef idx="1">
+          <a:schemeClr val="accent1"/>
+        </a:lnRef>
+        <a:fillRef idx="3">
+          <a:schemeClr val="accent1"/>
+        </a:fillRef>
+        <a:effectRef idx="2">
+          <a:schemeClr val="accent1"/>
+        </a:effectRef>
+        <a:fontRef idx="minor">
+          <a:schemeClr val="lt1"/>
+        </a:fontRef>
+      </a:style>
+    </a:spDef>
+    <a:lnDef>
+      <a:spPr/>
+      <a:bodyPr/>
+      <a:lstStyle/>
+      <a:style>
+        <a:lnRef idx="2">
+          <a:schemeClr val="accent1"/>
+        </a:lnRef>
+        <a:fillRef idx="0">
+          <a:schemeClr val="accent1"/>
+        </a:fillRef>
+        <a:effectRef idx="1">
+          <a:schemeClr val="accent1"/>
+        </a:effectRef>
+        <a:fontRef idx="minor">
+          <a:schemeClr val="tx1"/>
+        </a:fontRef>
+      </a:style>
+    </a:lnDef>
+  </a:objectDefaults>
+  <a:extraClrSchemeLst/>
+</a:theme>
 </file>
--- a/chapter1/clips/clip-01-introduction-to-datasets/clip.pptx
+++ b/chapter1/clips/clip-01-introduction-to-datasets/clip.pptx
@@ -6,12 +6,15 @@
   </p:sldMasterIdLst>
   <p:sldIdLst>
     <p:sldId id="256" r:id="rId7"/>
-    <p:sldId id="257" r:id="rId8"/>
-    <p:sldId id="258" r:id="rId9"/>
-    <p:sldId id="259" r:id="rId10"/>
-    <p:sldId id="260" r:id="rId11"/>
+    <p:sldId id="257" r:id="rId9"/>
+    <p:sldId id="258" r:id="rId10"/>
+    <p:sldId id="259" r:id="rId11"/>
+    <p:sldId id="260" r:id="rId12"/>
     <p:sldId id="261" r:id="rId13"/>
     <p:sldId id="262" r:id="rId14"/>
+    <p:sldId id="263" r:id="rId15"/>
+    <p:sldId id="264" r:id="rId16"/>
+    <p:sldId id="265" r:id="rId17"/>
   </p:sldIdLst>
   <p:sldSz cx="12191695" cy="6858000" type="screen4x3"/>
   <p:notesSz cx="6858000" cy="9144000"/>
@@ -508,12 +511,7 @@
           <a:lstStyle/>
           <a:p>
             <a:r>
-              <a:t>Setting: six retail transactions in CSV</a:t>
-            </a:r>
-          </a:p>
-          <a:p>
-            <a:r>
-              <a:t>Key idea: each row is one sale; columns describe it</a:t>
+              <a:t>This clip opens Chapter 1 by answering a deceptively simple question: what counts as a dataset? By the end, the vocabulary of records and attributes should feel concrete, whether the file is a spreadsheet or a JSON document.</a:t>
             </a:r>
           </a:p>
         </p:txBody>
@@ -583,17 +581,427 @@
           <a:lstStyle/>
           <a:p>
             <a:r>
-              <a:t>Setting: nested property listings (semi-structured)</a:t>
-            </a:r>
-          </a:p>
-          <a:p>
-            <a:r>
-              <a:t>Key idea: records need not be flat tables</a:t>
-            </a:r>
-          </a:p>
-          <a:p>
-            <a:r>
-              <a:t>Same goal: meaningful, interpretable data for analysis</a:t>
+              <a:t>Three goals guide this clip. First, define a dataset as something curated for analysis, not merely a raw stream of events. Second, separate records from attributes so every later example has a shared language. Third, see that the same idea appears in both flat CSV tables and nested JSON.</a:t>
+            </a:r>
+          </a:p>
+        </p:txBody>
+      </p:sp>
+      <p:sp>
+        <p:nvSpPr>
+          <p:cNvPr id="4" name="Slide Number Placeholder 3"/>
+          <p:cNvSpPr>
+            <a:spLocks noGrp="1"/>
+          </p:cNvSpPr>
+          <p:nvPr>
+            <p:ph type="sldNum" idx="5" sz="quarter"/>
+          </p:nvPr>
+        </p:nvSpPr>
+        <p:spPr/>
+      </p:sp>
+    </p:spTree>
+  </p:cSld>
+  <p:clrMapOvr>
+    <a:masterClrMapping/>
+  </p:clrMapOvr>
+</p:notes>
+</file>
+
+<file path=ppt/notesSlides/notesSlide3.xml><?xml version="1.0" encoding="utf-8"?>
+<p:notes xmlns:a="http://schemas.openxmlformats.org/drawingml/2006/main" xmlns:p="http://schemas.openxmlformats.org/presentationml/2006/main" xmlns:r="http://schemas.openxmlformats.org/officeDocument/2006/relationships">
+  <p:cSld>
+    <p:spTree>
+      <p:nvGrpSpPr>
+        <p:cNvPr id="1" name=""/>
+        <p:cNvGrpSpPr/>
+        <p:nvPr/>
+      </p:nvGrpSpPr>
+      <p:grpSpPr>
+        <a:xfrm>
+          <a:off x="0" y="0"/>
+          <a:ext cx="0" cy="0"/>
+          <a:chOff x="0" y="0"/>
+          <a:chExt cx="0" cy="0"/>
+        </a:xfrm>
+      </p:grpSpPr>
+      <p:sp>
+        <p:nvSpPr>
+          <p:cNvPr id="2" name="Slide Image Placeholder 1"/>
+          <p:cNvSpPr>
+            <a:spLocks noGrp="1"/>
+          </p:cNvSpPr>
+          <p:nvPr>
+            <p:ph type="sldImg" idx="2"/>
+          </p:nvPr>
+        </p:nvSpPr>
+        <p:spPr/>
+      </p:sp>
+      <p:sp>
+        <p:nvSpPr>
+          <p:cNvPr id="3" name="Notes Placeholder 2"/>
+          <p:cNvSpPr>
+            <a:spLocks noGrp="1"/>
+          </p:cNvSpPr>
+          <p:nvPr>
+            <p:ph type="body" idx="3" sz="quarter"/>
+          </p:nvPr>
+        </p:nvSpPr>
+        <p:spPr/>
+        <p:txBody>
+          <a:bodyPr/>
+          <a:lstStyle/>
+          <a:p>
+            <a:r>
+              <a:t>A dataset is a curated collection of data, often organized as records and attributes, that serves as input to analysis, modeling, or decision-making. Unlike raw operational logs, a dataset usually has defined scope, structure, and ideally documentation that makes it interpretable. In modern data work, the dataset is the basic unit—whether the task is machine learning, statistics, or business intelligence.</a:t>
+            </a:r>
+          </a:p>
+        </p:txBody>
+      </p:sp>
+      <p:sp>
+        <p:nvSpPr>
+          <p:cNvPr id="4" name="Slide Number Placeholder 3"/>
+          <p:cNvSpPr>
+            <a:spLocks noGrp="1"/>
+          </p:cNvSpPr>
+          <p:nvPr>
+            <p:ph type="sldNum" idx="5" sz="quarter"/>
+          </p:nvPr>
+        </p:nvSpPr>
+        <p:spPr/>
+      </p:sp>
+    </p:spTree>
+  </p:cSld>
+  <p:clrMapOvr>
+    <a:masterClrMapping/>
+  </p:clrMapOvr>
+</p:notes>
+</file>
+
+<file path=ppt/notesSlides/notesSlide4.xml><?xml version="1.0" encoding="utf-8"?>
+<p:notes xmlns:a="http://schemas.openxmlformats.org/drawingml/2006/main" xmlns:p="http://schemas.openxmlformats.org/presentationml/2006/main" xmlns:r="http://schemas.openxmlformats.org/officeDocument/2006/relationships">
+  <p:cSld>
+    <p:spTree>
+      <p:nvGrpSpPr>
+        <p:cNvPr id="1" name=""/>
+        <p:cNvGrpSpPr/>
+        <p:nvPr/>
+      </p:nvGrpSpPr>
+      <p:grpSpPr>
+        <a:xfrm>
+          <a:off x="0" y="0"/>
+          <a:ext cx="0" cy="0"/>
+          <a:chOff x="0" y="0"/>
+          <a:chExt cx="0" cy="0"/>
+        </a:xfrm>
+      </p:grpSpPr>
+      <p:sp>
+        <p:nvSpPr>
+          <p:cNvPr id="2" name="Slide Image Placeholder 1"/>
+          <p:cNvSpPr>
+            <a:spLocks noGrp="1"/>
+          </p:cNvSpPr>
+          <p:nvPr>
+            <p:ph type="sldImg" idx="2"/>
+          </p:nvPr>
+        </p:nvSpPr>
+        <p:spPr/>
+      </p:sp>
+      <p:sp>
+        <p:nvSpPr>
+          <p:cNvPr id="3" name="Notes Placeholder 2"/>
+          <p:cNvSpPr>
+            <a:spLocks noGrp="1"/>
+          </p:cNvSpPr>
+          <p:nvPr>
+            <p:ph type="body" idx="3" sz="quarter"/>
+          </p:nvPr>
+        </p:nvSpPr>
+        <p:spPr/>
+        <p:txBody>
+          <a:bodyPr/>
+          <a:lstStyle/>
+          <a:p>
+            <a:r>
+              <a:t>In tabular data, each record is one observation—one sale, one patient, one sensor reading—and each attribute describes a property of that observation. The sales CSV uses Date, Product, Quantity, and Price as attributes; each row is one transaction. The same mapping appears in healthcare and sensor examples later in the section: change the domain, keep the structure.</a:t>
+            </a:r>
+          </a:p>
+        </p:txBody>
+      </p:sp>
+      <p:sp>
+        <p:nvSpPr>
+          <p:cNvPr id="4" name="Slide Number Placeholder 3"/>
+          <p:cNvSpPr>
+            <a:spLocks noGrp="1"/>
+          </p:cNvSpPr>
+          <p:nvPr>
+            <p:ph type="sldNum" idx="5" sz="quarter"/>
+          </p:nvPr>
+        </p:nvSpPr>
+        <p:spPr/>
+      </p:sp>
+    </p:spTree>
+  </p:cSld>
+  <p:clrMapOvr>
+    <a:masterClrMapping/>
+  </p:clrMapOvr>
+</p:notes>
+</file>
+
+<file path=ppt/notesSlides/notesSlide5.xml><?xml version="1.0" encoding="utf-8"?>
+<p:notes xmlns:a="http://schemas.openxmlformats.org/drawingml/2006/main" xmlns:p="http://schemas.openxmlformats.org/presentationml/2006/main" xmlns:r="http://schemas.openxmlformats.org/officeDocument/2006/relationships">
+  <p:cSld>
+    <p:spTree>
+      <p:nvGrpSpPr>
+        <p:cNvPr id="1" name=""/>
+        <p:cNvGrpSpPr/>
+        <p:nvPr/>
+      </p:nvGrpSpPr>
+      <p:grpSpPr>
+        <a:xfrm>
+          <a:off x="0" y="0"/>
+          <a:ext cx="0" cy="0"/>
+          <a:chOff x="0" y="0"/>
+          <a:chExt cx="0" cy="0"/>
+        </a:xfrm>
+      </p:grpSpPr>
+      <p:sp>
+        <p:nvSpPr>
+          <p:cNvPr id="2" name="Slide Image Placeholder 1"/>
+          <p:cNvSpPr>
+            <a:spLocks noGrp="1"/>
+          </p:cNvSpPr>
+          <p:nvPr>
+            <p:ph type="sldImg" idx="2"/>
+          </p:nvPr>
+        </p:nvSpPr>
+        <p:spPr/>
+      </p:sp>
+      <p:sp>
+        <p:nvSpPr>
+          <p:cNvPr id="3" name="Notes Placeholder 2"/>
+          <p:cNvSpPr>
+            <a:spLocks noGrp="1"/>
+          </p:cNvSpPr>
+          <p:nvPr>
+            <p:ph type="body" idx="3" sz="quarter"/>
+          </p:nvPr>
+        </p:nvSpPr>
+        <p:spPr/>
+        <p:txBody>
+          <a:bodyPr/>
+          <a:lstStyle/>
+          <a:p>
+            <a:r>
+              <a:t>Example 1.1 is the chapter's first concrete anchor: a small CSV of retail sales. Each row is one sale; columns detail product, date, quantity, and price. Open the example 1 module for this chapter to inspect the file and count rows and columns before moving on. Later examples change domain but keep this shape.</a:t>
+            </a:r>
+          </a:p>
+        </p:txBody>
+      </p:sp>
+      <p:sp>
+        <p:nvSpPr>
+          <p:cNvPr id="4" name="Slide Number Placeholder 3"/>
+          <p:cNvSpPr>
+            <a:spLocks noGrp="1"/>
+          </p:cNvSpPr>
+          <p:nvPr>
+            <p:ph type="sldNum" idx="5" sz="quarter"/>
+          </p:nvPr>
+        </p:nvSpPr>
+        <p:spPr/>
+      </p:sp>
+    </p:spTree>
+  </p:cSld>
+  <p:clrMapOvr>
+    <a:masterClrMapping/>
+  </p:clrMapOvr>
+</p:notes>
+</file>
+
+<file path=ppt/notesSlides/notesSlide6.xml><?xml version="1.0" encoding="utf-8"?>
+<p:notes xmlns:a="http://schemas.openxmlformats.org/drawingml/2006/main" xmlns:p="http://schemas.openxmlformats.org/presentationml/2006/main" xmlns:r="http://schemas.openxmlformats.org/officeDocument/2006/relationships">
+  <p:cSld>
+    <p:spTree>
+      <p:nvGrpSpPr>
+        <p:cNvPr id="1" name=""/>
+        <p:cNvGrpSpPr/>
+        <p:nvPr/>
+      </p:nvGrpSpPr>
+      <p:grpSpPr>
+        <a:xfrm>
+          <a:off x="0" y="0"/>
+          <a:ext cx="0" cy="0"/>
+          <a:chOff x="0" y="0"/>
+          <a:chExt cx="0" cy="0"/>
+        </a:xfrm>
+      </p:grpSpPr>
+      <p:sp>
+        <p:nvSpPr>
+          <p:cNvPr id="2" name="Slide Image Placeholder 1"/>
+          <p:cNvSpPr>
+            <a:spLocks noGrp="1"/>
+          </p:cNvSpPr>
+          <p:nvPr>
+            <p:ph type="sldImg" idx="2"/>
+          </p:nvPr>
+        </p:nvSpPr>
+        <p:spPr/>
+      </p:sp>
+      <p:sp>
+        <p:nvSpPr>
+          <p:cNvPr id="3" name="Notes Placeholder 2"/>
+          <p:cNvSpPr>
+            <a:spLocks noGrp="1"/>
+          </p:cNvSpPr>
+          <p:nvPr>
+            <p:ph type="body" idx="3" sz="quarter"/>
+          </p:nvPr>
+        </p:nvSpPr>
+        <p:spPr/>
+        <p:txBody>
+          <a:bodyPr/>
+          <a:lstStyle/>
+          <a:p>
+            <a:r>
+              <a:t>Datasets are not only tables. Example 1.4 stores housing listings as JSON with nested fields—still records with attributes, but in a flexible schema. The form changes; the objective stays the same: provide meaningful data that can be turned into insight. Try the example 4 module to see how keys and nested objects play the role of columns.</a:t>
+            </a:r>
+          </a:p>
+        </p:txBody>
+      </p:sp>
+      <p:sp>
+        <p:nvSpPr>
+          <p:cNvPr id="4" name="Slide Number Placeholder 3"/>
+          <p:cNvSpPr>
+            <a:spLocks noGrp="1"/>
+          </p:cNvSpPr>
+          <p:nvPr>
+            <p:ph type="sldNum" idx="5" sz="quarter"/>
+          </p:nvPr>
+        </p:nvSpPr>
+        <p:spPr/>
+      </p:sp>
+    </p:spTree>
+  </p:cSld>
+  <p:clrMapOvr>
+    <a:masterClrMapping/>
+  </p:clrMapOvr>
+</p:notes>
+</file>
+
+<file path=ppt/notesSlides/notesSlide7.xml><?xml version="1.0" encoding="utf-8"?>
+<p:notes xmlns:a="http://schemas.openxmlformats.org/drawingml/2006/main" xmlns:p="http://schemas.openxmlformats.org/presentationml/2006/main" xmlns:r="http://schemas.openxmlformats.org/officeDocument/2006/relationships">
+  <p:cSld>
+    <p:spTree>
+      <p:nvGrpSpPr>
+        <p:cNvPr id="1" name=""/>
+        <p:cNvGrpSpPr/>
+        <p:nvPr/>
+      </p:nvGrpSpPr>
+      <p:grpSpPr>
+        <a:xfrm>
+          <a:off x="0" y="0"/>
+          <a:ext cx="0" cy="0"/>
+          <a:chOff x="0" y="0"/>
+          <a:chExt cx="0" cy="0"/>
+        </a:xfrm>
+      </p:grpSpPr>
+      <p:sp>
+        <p:nvSpPr>
+          <p:cNvPr id="2" name="Slide Image Placeholder 1"/>
+          <p:cNvSpPr>
+            <a:spLocks noGrp="1"/>
+          </p:cNvSpPr>
+          <p:nvPr>
+            <p:ph type="sldImg" idx="2"/>
+          </p:nvPr>
+        </p:nvSpPr>
+        <p:spPr/>
+      </p:sp>
+      <p:sp>
+        <p:nvSpPr>
+          <p:cNvPr id="3" name="Notes Placeholder 2"/>
+          <p:cNvSpPr>
+            <a:spLocks noGrp="1"/>
+          </p:cNvSpPr>
+          <p:nvPr>
+            <p:ph type="body" idx="3" sz="quarter"/>
+          </p:nvPr>
+        </p:nvSpPr>
+        <p:spPr/>
+        <p:txBody>
+          <a:bodyPr/>
+          <a:lstStyle/>
+          <a:p>
+            <a:r>
+              <a:t>Remember three points. A dataset is prepared for a purpose. Records and attributes are the shared vocabulary. Formats and modalities vary widely, but the goal of interpretable, usable data does not.</a:t>
+            </a:r>
+          </a:p>
+        </p:txBody>
+      </p:sp>
+      <p:sp>
+        <p:nvSpPr>
+          <p:cNvPr id="4" name="Slide Number Placeholder 3"/>
+          <p:cNvSpPr>
+            <a:spLocks noGrp="1"/>
+          </p:cNvSpPr>
+          <p:nvPr>
+            <p:ph type="sldNum" idx="5" sz="quarter"/>
+          </p:nvPr>
+        </p:nvSpPr>
+        <p:spPr/>
+      </p:sp>
+    </p:spTree>
+  </p:cSld>
+  <p:clrMapOvr>
+    <a:masterClrMapping/>
+  </p:clrMapOvr>
+</p:notes>
+</file>
+
+<file path=ppt/notesSlides/notesSlide8.xml><?xml version="1.0" encoding="utf-8"?>
+<p:notes xmlns:a="http://schemas.openxmlformats.org/drawingml/2006/main" xmlns:p="http://schemas.openxmlformats.org/presentationml/2006/main" xmlns:r="http://schemas.openxmlformats.org/officeDocument/2006/relationships">
+  <p:cSld>
+    <p:spTree>
+      <p:nvGrpSpPr>
+        <p:cNvPr id="1" name=""/>
+        <p:cNvGrpSpPr/>
+        <p:nvPr/>
+      </p:nvGrpSpPr>
+      <p:grpSpPr>
+        <a:xfrm>
+          <a:off x="0" y="0"/>
+          <a:ext cx="0" cy="0"/>
+          <a:chOff x="0" y="0"/>
+          <a:chExt cx="0" cy="0"/>
+        </a:xfrm>
+      </p:grpSpPr>
+      <p:sp>
+        <p:nvSpPr>
+          <p:cNvPr id="2" name="Slide Image Placeholder 1"/>
+          <p:cNvSpPr>
+            <a:spLocks noGrp="1"/>
+          </p:cNvSpPr>
+          <p:nvPr>
+            <p:ph type="sldImg" idx="2"/>
+          </p:nvPr>
+        </p:nvSpPr>
+        <p:spPr/>
+      </p:sp>
+      <p:sp>
+        <p:nvSpPr>
+          <p:cNvPr id="3" name="Notes Placeholder 2"/>
+          <p:cNvSpPr>
+            <a:spLocks noGrp="1"/>
+          </p:cNvSpPr>
+          <p:nvPr>
+            <p:ph type="body" idx="3" sz="quarter"/>
+          </p:nvPr>
+        </p:nvSpPr>
+        <p:spPr/>
+        <p:txBody>
+          <a:bodyPr/>
+          <a:lstStyle/>
+          <a:p>
+            <a:r>
+              <a:t>Pause for the quiz, then continue to the next clip on types of datasets—structured, unstructured, and semi-structured.</a:t>
             </a:r>
           </a:p>
         </p:txBody>
@@ -3655,7 +4063,7 @@
                 </a:solidFill>
                 <a:latin typeface="Calibri"/>
               </a:rPr>
-              <a:t>Define a dataset as curated records and attributes prepared for a purpose</a:t>
+              <a:t>This clip opens Chapter 1 by answering a deceptively simple question: what counts as a dataset?</a:t>
             </a:r>
           </a:p>
         </p:txBody>
@@ -3694,7 +4102,166 @@
               </a:defRPr>
             </a:pPr>
             <a:r>
-              <a:t>Chapter 1 — Introduction To Datasets</a:t>
+              <a:t>Chapter 1 — 01 Introduction To Datasets</a:t>
+            </a:r>
+          </a:p>
+        </p:txBody>
+      </p:sp>
+    </p:spTree>
+  </p:cSld>
+  <p:clrMapOvr>
+    <a:masterClrMapping/>
+  </p:clrMapOvr>
+</p:sld>
+</file>
+
+<file path=ppt/slides/slide10.xml><?xml version="1.0" encoding="utf-8"?>
+<p:sld xmlns:a="http://schemas.openxmlformats.org/drawingml/2006/main" xmlns:p="http://schemas.openxmlformats.org/presentationml/2006/main" xmlns:r="http://schemas.openxmlformats.org/officeDocument/2006/relationships">
+  <p:cSld>
+    <p:spTree>
+      <p:nvGrpSpPr>
+        <p:cNvPr id="1" name=""/>
+        <p:cNvGrpSpPr/>
+        <p:nvPr/>
+      </p:nvGrpSpPr>
+      <p:grpSpPr/>
+      <p:sp>
+        <p:nvSpPr>
+          <p:cNvPr id="2" name="TextBox 1"/>
+          <p:cNvSpPr txBox="1"/>
+          <p:nvPr/>
+        </p:nvSpPr>
+        <p:spPr>
+          <a:xfrm>
+            <a:off x="548640" y="411480"/>
+            <a:ext cx="11064240" cy="777240"/>
+          </a:xfrm>
+          <a:prstGeom prst="rect">
+            <a:avLst/>
+          </a:prstGeom>
+          <a:noFill/>
+        </p:spPr>
+        <p:txBody>
+          <a:bodyPr wrap="square">
+            <a:noAutofit/>
+          </a:bodyPr>
+          <a:lstStyle/>
+          <a:p>
+            <a:pPr>
+              <a:lnSpc>
+                <a:spcPts val="2200"/>
+              </a:lnSpc>
+            </a:pPr>
+            <a:r>
+              <a:rPr sz="2800" b="1">
+                <a:solidFill>
+                  <a:srgbClr val="1A1A2E"/>
+                </a:solidFill>
+                <a:latin typeface="Calibri"/>
+              </a:rPr>
+              <a:t>Next</a:t>
+            </a:r>
+          </a:p>
+        </p:txBody>
+      </p:sp>
+      <p:sp>
+        <p:nvSpPr>
+          <p:cNvPr id="3" name="TextBox 2"/>
+          <p:cNvSpPr txBox="1"/>
+          <p:nvPr/>
+        </p:nvSpPr>
+        <p:spPr>
+          <a:xfrm>
+            <a:off x="548640" y="1234440"/>
+            <a:ext cx="11064240" cy="4937760"/>
+          </a:xfrm>
+          <a:prstGeom prst="rect">
+            <a:avLst/>
+          </a:prstGeom>
+          <a:noFill/>
+        </p:spPr>
+        <p:txBody>
+          <a:bodyPr wrap="square">
+            <a:noAutofit/>
+          </a:bodyPr>
+          <a:lstStyle/>
+          <a:p>
+            <a:pPr>
+              <a:spcAft>
+                <a:spcPts val="1000"/>
+              </a:spcAft>
+              <a:buChar char="•"/>
+              <a:lnSpc>
+                <a:spcPts val="2200"/>
+              </a:lnSpc>
+            </a:pPr>
+            <a:r>
+              <a:rPr sz="2000" b="0">
+                <a:solidFill>
+                  <a:srgbClr val="333333"/>
+                </a:solidFill>
+                <a:latin typeface="Calibri"/>
+              </a:rPr>
+              <a:t>Complete the quiz for this clip</a:t>
+            </a:r>
+          </a:p>
+          <a:p>
+            <a:pPr>
+              <a:spcAft>
+                <a:spcPts val="1000"/>
+              </a:spcAft>
+              <a:buChar char="•"/>
+              <a:lnSpc>
+                <a:spcPts val="2200"/>
+              </a:lnSpc>
+            </a:pPr>
+            <a:r>
+              <a:rPr sz="2000" b="0">
+                <a:solidFill>
+                  <a:srgbClr val="333333"/>
+                </a:solidFill>
+                <a:latin typeface="Calibri"/>
+              </a:rPr>
+              <a:t>Continue to the next clip on types of datasets, structured, unstructured</a:t>
+            </a:r>
+          </a:p>
+        </p:txBody>
+      </p:sp>
+      <p:sp>
+        <p:nvSpPr>
+          <p:cNvPr id="4" name="TextBox 3"/>
+          <p:cNvSpPr txBox="1"/>
+          <p:nvPr/>
+        </p:nvSpPr>
+        <p:spPr>
+          <a:xfrm>
+            <a:off x="548640" y="6355080"/>
+            <a:ext cx="11064240" cy="320040"/>
+          </a:xfrm>
+          <a:prstGeom prst="rect">
+            <a:avLst/>
+          </a:prstGeom>
+          <a:noFill/>
+        </p:spPr>
+        <p:txBody>
+          <a:bodyPr wrap="square">
+            <a:noAutofit/>
+          </a:bodyPr>
+          <a:lstStyle/>
+          <a:p>
+            <a:pPr algn="r">
+              <a:lnSpc>
+                <a:spcPts val="2200"/>
+              </a:lnSpc>
+              <a:defRPr sz="1000" b="0">
+                <a:solidFill>
+                  <a:srgbClr val="666666"/>
+                </a:solidFill>
+                <a:latin typeface="Calibri"/>
+              </a:defRPr>
+            </a:pPr>
+            <a:r>
+              <a:t>Chapter 1 — 01 Introduction To Datasets</a:t>
             </a:r>
           </a:p>
         </p:txBody>
@@ -3779,12 +4346,13 @@
           <a:lstStyle/>
           <a:p>
             <a:pPr>
-              <a:lnSpc>
-                <a:spcPts val="2200"/>
-              </a:lnSpc>
               <a:spcAft>
                 <a:spcPts val="1000"/>
               </a:spcAft>
+              <a:buChar char="•"/>
+              <a:lnSpc>
+                <a:spcPts val="2200"/>
+              </a:lnSpc>
             </a:pPr>
             <a:r>
               <a:rPr sz="2000" b="0">
@@ -3793,17 +4361,18 @@
                 </a:solidFill>
                 <a:latin typeface="Calibri"/>
               </a:rPr>
-              <a:t>• Define what counts as a dataset (vs raw logs)</a:t>
+              <a:t>Define a dataset as curated for analysis, not raw event streams</a:t>
             </a:r>
           </a:p>
           <a:p>
             <a:pPr>
-              <a:lnSpc>
-                <a:spcPts val="2200"/>
-              </a:lnSpc>
               <a:spcAft>
                 <a:spcPts val="1000"/>
               </a:spcAft>
+              <a:buChar char="•"/>
+              <a:lnSpc>
+                <a:spcPts val="2200"/>
+              </a:lnSpc>
             </a:pPr>
             <a:r>
               <a:rPr sz="2000" b="0">
@@ -3812,17 +4381,18 @@
                 </a:solidFill>
                 <a:latin typeface="Calibri"/>
               </a:rPr>
-              <a:t>• Distinguish records (rows) from attributes (columns)</a:t>
+              <a:t>Distinguish records from attributes (shared vocabulary)</a:t>
             </a:r>
           </a:p>
           <a:p>
             <a:pPr>
-              <a:lnSpc>
-                <a:spcPts val="2200"/>
-              </a:lnSpc>
               <a:spcAft>
                 <a:spcPts val="1000"/>
               </a:spcAft>
+              <a:buChar char="•"/>
+              <a:lnSpc>
+                <a:spcPts val="2200"/>
+              </a:lnSpc>
             </a:pPr>
             <a:r>
               <a:rPr sz="2000" b="0">
@@ -3831,7 +4401,7 @@
                 </a:solidFill>
                 <a:latin typeface="Calibri"/>
               </a:rPr>
-              <a:t>• Recognize the same idea in CSV and JSON forms</a:t>
+              <a:t>Same idea in CSV tables and nested JSON</a:t>
             </a:r>
           </a:p>
         </p:txBody>
@@ -3870,7 +4440,7 @@
               </a:defRPr>
             </a:pPr>
             <a:r>
-              <a:t>Chapter 1 — Introduction To Datasets</a:t>
+              <a:t>Chapter 1 — 01 Introduction To Datasets</a:t>
             </a:r>
           </a:p>
         </p:txBody>
@@ -3955,12 +4525,13 @@
           <a:lstStyle/>
           <a:p>
             <a:pPr>
-              <a:lnSpc>
-                <a:spcPts val="2200"/>
-              </a:lnSpc>
               <a:spcAft>
                 <a:spcPts val="1000"/>
               </a:spcAft>
+              <a:buChar char="•"/>
+              <a:lnSpc>
+                <a:spcPts val="2200"/>
+              </a:lnSpc>
             </a:pPr>
             <a:r>
               <a:rPr sz="2000" b="0">
@@ -3969,17 +4540,18 @@
                 </a:solidFill>
                 <a:latin typeface="Calibri"/>
               </a:rPr>
-              <a:t>• Curated collection of data for analysis or decisions</a:t>
+              <a:t>A dataset is a curated collection of data</a:t>
             </a:r>
           </a:p>
           <a:p>
             <a:pPr>
-              <a:lnSpc>
-                <a:spcPts val="2200"/>
-              </a:lnSpc>
               <a:spcAft>
                 <a:spcPts val="1000"/>
               </a:spcAft>
+              <a:buChar char="•"/>
+              <a:lnSpc>
+                <a:spcPts val="2200"/>
+              </a:lnSpc>
             </a:pPr>
             <a:r>
               <a:rPr sz="2000" b="0">
@@ -3988,17 +4560,18 @@
                 </a:solidFill>
                 <a:latin typeface="Calibri"/>
               </a:rPr>
-              <a:t>• Typically organized as records and attributes</a:t>
+              <a:t>Has scope, structure, and documentation</a:t>
             </a:r>
           </a:p>
           <a:p>
             <a:pPr>
-              <a:lnSpc>
-                <a:spcPts val="2200"/>
-              </a:lnSpc>
               <a:spcAft>
                 <a:spcPts val="1000"/>
               </a:spcAft>
+              <a:buChar char="•"/>
+              <a:lnSpc>
+                <a:spcPts val="2200"/>
+              </a:lnSpc>
             </a:pPr>
             <a:r>
               <a:rPr sz="2000" b="0">
@@ -4007,64 +4580,7 @@
                 </a:solidFill>
                 <a:latin typeface="Calibri"/>
               </a:rPr>
-              <a:t>• Prepared for a purpose: scope, structure,</a:t>
-            </a:r>
-          </a:p>
-          <a:p>
-            <a:pPr>
-              <a:lnSpc>
-                <a:spcPts val="2200"/>
-              </a:lnSpc>
-              <a:spcAft>
-                <a:spcPts val="1000"/>
-              </a:spcAft>
-            </a:pPr>
-            <a:r>
-              <a:rPr sz="2000" b="0">
-                <a:solidFill>
-                  <a:srgbClr val="333333"/>
-                </a:solidFill>
-                <a:latin typeface="Calibri"/>
-              </a:rPr>
-              <a:t>      documentation</a:t>
-            </a:r>
-          </a:p>
-          <a:p>
-            <a:pPr>
-              <a:lnSpc>
-                <a:spcPts val="2200"/>
-              </a:lnSpc>
-              <a:spcAft>
-                <a:spcPts val="1000"/>
-              </a:spcAft>
-            </a:pPr>
-            <a:r>
-              <a:rPr sz="2000" b="0">
-                <a:solidFill>
-                  <a:srgbClr val="333333"/>
-                </a:solidFill>
-                <a:latin typeface="Calibri"/>
-              </a:rPr>
-              <a:t>• Basic unit for ML, statistics, and business</a:t>
-            </a:r>
-          </a:p>
-          <a:p>
-            <a:pPr>
-              <a:lnSpc>
-                <a:spcPts val="2200"/>
-              </a:lnSpc>
-              <a:spcAft>
-                <a:spcPts val="1000"/>
-              </a:spcAft>
-            </a:pPr>
-            <a:r>
-              <a:rPr sz="2000" b="0">
-                <a:solidFill>
-                  <a:srgbClr val="333333"/>
-                </a:solidFill>
-                <a:latin typeface="Calibri"/>
-              </a:rPr>
-              <a:t>      intelligence</a:t>
+              <a:t>The dataset is the basic unit for ML, statistics, and BI</a:t>
             </a:r>
           </a:p>
         </p:txBody>
@@ -4103,7 +4619,7 @@
               </a:defRPr>
             </a:pPr>
             <a:r>
-              <a:t>Chapter 1 — Introduction To Datasets</a:t>
+              <a:t>Chapter 1 — 01 Introduction To Datasets</a:t>
             </a:r>
           </a:p>
         </p:txBody>
@@ -4188,12 +4704,13 @@
           <a:lstStyle/>
           <a:p>
             <a:pPr>
-              <a:lnSpc>
-                <a:spcPts val="2200"/>
-              </a:lnSpc>
               <a:spcAft>
                 <a:spcPts val="1000"/>
               </a:spcAft>
+              <a:buChar char="•"/>
+              <a:lnSpc>
+                <a:spcPts val="2200"/>
+              </a:lnSpc>
             </a:pPr>
             <a:r>
               <a:rPr sz="2000" b="0">
@@ -4202,35 +4719,18 @@
                 </a:solidFill>
                 <a:latin typeface="Calibri"/>
               </a:rPr>
-              <a:t>• </a:t>
-            </a:r>
-            <a:r>
-              <a:rPr sz="2000" b="1">
-                <a:solidFill>
-                  <a:srgbClr val="333333"/>
-                </a:solidFill>
-                <a:latin typeface="Calibri"/>
-              </a:rPr>
-              <a:t>Record</a:t>
-            </a:r>
-            <a:r>
-              <a:rPr sz="2000" b="0">
-                <a:solidFill>
-                  <a:srgbClr val="333333"/>
-                </a:solidFill>
-                <a:latin typeface="Calibri"/>
-              </a:rPr>
-              <a:t> — one observation (row, instance)</a:t>
+              <a:t>Each record is one observation; each attribute describes it</a:t>
             </a:r>
           </a:p>
           <a:p>
             <a:pPr>
-              <a:lnSpc>
-                <a:spcPts val="2200"/>
-              </a:lnSpc>
               <a:spcAft>
                 <a:spcPts val="1000"/>
               </a:spcAft>
+              <a:buChar char="•"/>
+              <a:lnSpc>
+                <a:spcPts val="2200"/>
+              </a:lnSpc>
             </a:pPr>
             <a:r>
               <a:rPr sz="2000" b="0">
@@ -4239,35 +4739,18 @@
                 </a:solidFill>
                 <a:latin typeface="Calibri"/>
               </a:rPr>
-              <a:t>• </a:t>
-            </a:r>
-            <a:r>
-              <a:rPr sz="2000" b="1">
-                <a:solidFill>
-                  <a:srgbClr val="333333"/>
-                </a:solidFill>
-                <a:latin typeface="Calibri"/>
-              </a:rPr>
-              <a:t>Attribute</a:t>
-            </a:r>
-            <a:r>
-              <a:rPr sz="2000" b="0">
-                <a:solidFill>
-                  <a:srgbClr val="333333"/>
-                </a:solidFill>
-                <a:latin typeface="Calibri"/>
-              </a:rPr>
-              <a:t> — one property of that observation</a:t>
+              <a:t>The sales CSV uses Date, Product, Quantity, and Price as attributes</a:t>
             </a:r>
           </a:p>
           <a:p>
             <a:pPr>
-              <a:lnSpc>
-                <a:spcPts val="2200"/>
-              </a:lnSpc>
               <a:spcAft>
                 <a:spcPts val="1000"/>
               </a:spcAft>
+              <a:buChar char="•"/>
+              <a:lnSpc>
+                <a:spcPts val="2200"/>
+              </a:lnSpc>
             </a:pPr>
             <a:r>
               <a:rPr sz="2000" b="0">
@@ -4276,83 +4759,7 @@
                 </a:solidFill>
                 <a:latin typeface="Calibri"/>
               </a:rPr>
-              <a:t>      (column, field)</a:t>
-            </a:r>
-          </a:p>
-          <a:p>
-            <a:pPr>
-              <a:lnSpc>
-                <a:spcPts val="2200"/>
-              </a:lnSpc>
-              <a:spcAft>
-                <a:spcPts val="1000"/>
-              </a:spcAft>
-            </a:pPr>
-            <a:r>
-              <a:rPr sz="2000" b="0">
-                <a:solidFill>
-                  <a:srgbClr val="333333"/>
-                </a:solidFill>
-                <a:latin typeface="Calibri"/>
-              </a:rPr>
-              <a:t>• Sales example: one sale = one record; Date, Product,</a:t>
-            </a:r>
-          </a:p>
-          <a:p>
-            <a:pPr>
-              <a:lnSpc>
-                <a:spcPts val="2200"/>
-              </a:lnSpc>
-              <a:spcAft>
-                <a:spcPts val="1000"/>
-              </a:spcAft>
-            </a:pPr>
-            <a:r>
-              <a:rPr sz="2000" b="0">
-                <a:solidFill>
-                  <a:srgbClr val="333333"/>
-                </a:solidFill>
-                <a:latin typeface="Calibri"/>
-              </a:rPr>
-              <a:t>      Price = attributes</a:t>
-            </a:r>
-          </a:p>
-          <a:p>
-            <a:pPr>
-              <a:lnSpc>
-                <a:spcPts val="2200"/>
-              </a:lnSpc>
-              <a:spcAft>
-                <a:spcPts val="1000"/>
-              </a:spcAft>
-            </a:pPr>
-            <a:r>
-              <a:rPr sz="2000" b="0">
-                <a:solidFill>
-                  <a:srgbClr val="333333"/>
-                </a:solidFill>
-                <a:latin typeface="Calibri"/>
-              </a:rPr>
-              <a:t>• Same pattern in healthcare, sensors, and other</a:t>
-            </a:r>
-          </a:p>
-          <a:p>
-            <a:pPr>
-              <a:lnSpc>
-                <a:spcPts val="2200"/>
-              </a:lnSpc>
-              <a:spcAft>
-                <a:spcPts val="1000"/>
-              </a:spcAft>
-            </a:pPr>
-            <a:r>
-              <a:rPr sz="2000" b="0">
-                <a:solidFill>
-                  <a:srgbClr val="333333"/>
-                </a:solidFill>
-                <a:latin typeface="Calibri"/>
-              </a:rPr>
-              <a:t>      domains</a:t>
+              <a:t>The same mapping appears in healthcare and sensor examples later in the section</a:t>
             </a:r>
           </a:p>
         </p:txBody>
@@ -4391,7 +4798,7 @@
               </a:defRPr>
             </a:pPr>
             <a:r>
-              <a:t>Chapter 1 — Introduction To Datasets</a:t>
+              <a:t>Chapter 1 — 01 Introduction To Datasets</a:t>
             </a:r>
           </a:p>
         </p:txBody>
@@ -4461,15 +4868,13 @@
         </p:nvSpPr>
         <p:spPr>
           <a:xfrm>
-            <a:off x="548640" y="1051560"/>
-            <a:ext cx="11064240" cy="914400"/>
+            <a:off x="548640" y="1234440"/>
+            <a:ext cx="11064240" cy="4937760"/>
           </a:xfrm>
           <a:prstGeom prst="rect">
             <a:avLst/>
           </a:prstGeom>
-          <a:solidFill>
-            <a:srgbClr val="F4F4F4"/>
-          </a:solidFill>
+          <a:noFill/>
         </p:spPr>
         <p:txBody>
           <a:bodyPr wrap="square">
@@ -4478,21 +4883,102 @@
           <a:lstStyle/>
           <a:p>
             <a:pPr>
-              <a:lnSpc>
-                <a:spcPts val="2200"/>
-              </a:lnSpc>
               <a:spcAft>
-                <a:spcPts val="200"/>
+                <a:spcPts val="1000"/>
               </a:spcAft>
+              <a:buChar char="•"/>
+              <a:lnSpc>
+                <a:spcPts val="2200"/>
+              </a:lnSpc>
             </a:pPr>
             <a:r>
               <a:rPr sz="2000" b="0">
                 <a:solidFill>
                   <a:srgbClr val="333333"/>
                 </a:solidFill>
-                <a:latin typeface="Consolas"/>
+                <a:latin typeface="Calibri"/>
               </a:rPr>
-              <a:t>$ cd modules/chapter1/example1/ &amp;&amp; bash run.sh</a:t>
+              <a:t>Example 1.1 — hands-on module</a:t>
+            </a:r>
+          </a:p>
+          <a:p>
+            <a:pPr>
+              <a:spcAft>
+                <a:spcPts val="1000"/>
+              </a:spcAft>
+              <a:buChar char="•"/>
+              <a:lnSpc>
+                <a:spcPts val="2200"/>
+              </a:lnSpc>
+            </a:pPr>
+            <a:r>
+              <a:rPr sz="2000" b="0">
+                <a:solidFill>
+                  <a:srgbClr val="333333"/>
+                </a:solidFill>
+                <a:latin typeface="Calibri"/>
+              </a:rPr>
+              <a:t>First concrete anchor: a small CSV of retail sales</a:t>
+            </a:r>
+          </a:p>
+          <a:p>
+            <a:pPr>
+              <a:spcAft>
+                <a:spcPts val="1000"/>
+              </a:spcAft>
+              <a:buChar char="•"/>
+              <a:lnSpc>
+                <a:spcPts val="2200"/>
+              </a:lnSpc>
+            </a:pPr>
+            <a:r>
+              <a:rPr sz="2000" b="0">
+                <a:solidFill>
+                  <a:srgbClr val="333333"/>
+                </a:solidFill>
+                <a:latin typeface="Calibri"/>
+              </a:rPr>
+              <a:t>Each row is one sale; columns detail product, date, quantity, and price</a:t>
+            </a:r>
+          </a:p>
+          <a:p>
+            <a:pPr>
+              <a:spcAft>
+                <a:spcPts val="1000"/>
+              </a:spcAft>
+              <a:buChar char="•"/>
+              <a:lnSpc>
+                <a:spcPts val="2200"/>
+              </a:lnSpc>
+            </a:pPr>
+            <a:r>
+              <a:rPr sz="2000" b="0">
+                <a:solidFill>
+                  <a:srgbClr val="333333"/>
+                </a:solidFill>
+                <a:latin typeface="Calibri"/>
+              </a:rPr>
+              <a:t>Explore the chapter example module</a:t>
+            </a:r>
+          </a:p>
+          <a:p>
+            <a:pPr>
+              <a:spcAft>
+                <a:spcPts val="1000"/>
+              </a:spcAft>
+              <a:buChar char="•"/>
+              <a:lnSpc>
+                <a:spcPts val="2200"/>
+              </a:lnSpc>
+            </a:pPr>
+            <a:r>
+              <a:rPr sz="2000" b="0">
+                <a:solidFill>
+                  <a:srgbClr val="333333"/>
+                </a:solidFill>
+                <a:latin typeface="Calibri"/>
+              </a:rPr>
+              <a:t>View files: `modules/chapter1/example1/`</a:t>
             </a:r>
           </a:p>
         </p:txBody>
@@ -4531,7 +5017,7 @@
               </a:defRPr>
             </a:pPr>
             <a:r>
-              <a:t>Chapter 1 — Introduction To Datasets</a:t>
+              <a:t>Chapter 1 — 01 Introduction To Datasets</a:t>
             </a:r>
           </a:p>
         </p:txBody>
@@ -4588,7 +5074,7 @@
                 </a:solidFill>
                 <a:latin typeface="Calibri"/>
               </a:rPr>
-              <a:t>Example 1.4 — Housing prices in JSON</a:t>
+              <a:t>Example 1.1 — listing</a:t>
             </a:r>
           </a:p>
         </p:txBody>
@@ -4601,8 +5087,8 @@
         </p:nvSpPr>
         <p:spPr>
           <a:xfrm>
-            <a:off x="548640" y="1051560"/>
-            <a:ext cx="11064240" cy="914400"/>
+            <a:off x="548640" y="1143000"/>
+            <a:ext cx="11064240" cy="5029200"/>
           </a:xfrm>
           <a:prstGeom prst="rect">
             <a:avLst/>
@@ -4622,7 +5108,7 @@
                 <a:spcPts val="2200"/>
               </a:lnSpc>
               <a:spcAft>
-                <a:spcPts val="200"/>
+                <a:spcPts val="400"/>
               </a:spcAft>
             </a:pPr>
             <a:r>
@@ -4632,7 +5118,121 @@
                 </a:solidFill>
                 <a:latin typeface="Consolas"/>
               </a:rPr>
-              <a:t>$ cd modules/chapter1/example4/ &amp;&amp; bash run.sh</a:t>
+              <a:t>Date,Product,Quantity,Price,Total</a:t>
+            </a:r>
+          </a:p>
+          <a:p>
+            <a:pPr>
+              <a:lnSpc>
+                <a:spcPts val="2200"/>
+              </a:lnSpc>
+              <a:spcAft>
+                <a:spcPts val="400"/>
+              </a:spcAft>
+            </a:pPr>
+            <a:r>
+              <a:rPr sz="2000" b="0">
+                <a:solidFill>
+                  <a:srgbClr val="333333"/>
+                </a:solidFill>
+                <a:latin typeface="Consolas"/>
+              </a:rPr>
+              <a:t>2024-01-01,Apple,3,0.5,1.5</a:t>
+            </a:r>
+          </a:p>
+          <a:p>
+            <a:pPr>
+              <a:lnSpc>
+                <a:spcPts val="2200"/>
+              </a:lnSpc>
+              <a:spcAft>
+                <a:spcPts val="400"/>
+              </a:spcAft>
+            </a:pPr>
+            <a:r>
+              <a:rPr sz="2000" b="0">
+                <a:solidFill>
+                  <a:srgbClr val="333333"/>
+                </a:solidFill>
+                <a:latin typeface="Consolas"/>
+              </a:rPr>
+              <a:t>2024-01-01,Banana,2,0.3,0.6</a:t>
+            </a:r>
+          </a:p>
+          <a:p>
+            <a:pPr>
+              <a:lnSpc>
+                <a:spcPts val="2200"/>
+              </a:lnSpc>
+              <a:spcAft>
+                <a:spcPts val="400"/>
+              </a:spcAft>
+            </a:pPr>
+            <a:r>
+              <a:rPr sz="2000" b="0">
+                <a:solidFill>
+                  <a:srgbClr val="333333"/>
+                </a:solidFill>
+                <a:latin typeface="Consolas"/>
+              </a:rPr>
+              <a:t>2024-01-02,Orange,5,0.7,3.5</a:t>
+            </a:r>
+          </a:p>
+          <a:p>
+            <a:pPr>
+              <a:lnSpc>
+                <a:spcPts val="2200"/>
+              </a:lnSpc>
+              <a:spcAft>
+                <a:spcPts val="400"/>
+              </a:spcAft>
+            </a:pPr>
+            <a:r>
+              <a:rPr sz="2000" b="0">
+                <a:solidFill>
+                  <a:srgbClr val="333333"/>
+                </a:solidFill>
+                <a:latin typeface="Consolas"/>
+              </a:rPr>
+              <a:t>2024-01-02,Grapes,1,2.0,2.0</a:t>
+            </a:r>
+          </a:p>
+          <a:p>
+            <a:pPr>
+              <a:lnSpc>
+                <a:spcPts val="2200"/>
+              </a:lnSpc>
+              <a:spcAft>
+                <a:spcPts val="400"/>
+              </a:spcAft>
+            </a:pPr>
+            <a:r>
+              <a:rPr sz="2000" b="0">
+                <a:solidFill>
+                  <a:srgbClr val="333333"/>
+                </a:solidFill>
+                <a:latin typeface="Consolas"/>
+              </a:rPr>
+              <a:t>2024-01-03,Mango,4,1.5,6.0</a:t>
+            </a:r>
+          </a:p>
+          <a:p>
+            <a:pPr>
+              <a:lnSpc>
+                <a:spcPts val="2200"/>
+              </a:lnSpc>
+              <a:spcAft>
+                <a:spcPts val="400"/>
+              </a:spcAft>
+            </a:pPr>
+            <a:r>
+              <a:rPr sz="2000" b="0">
+                <a:solidFill>
+                  <a:srgbClr val="333333"/>
+                </a:solidFill>
+                <a:latin typeface="Consolas"/>
+              </a:rPr>
+              <a:t>2024-01-04,Apple,2,0.5,1.0</a:t>
             </a:r>
           </a:p>
         </p:txBody>
@@ -4671,7 +5271,7 @@
               </a:defRPr>
             </a:pPr>
             <a:r>
-              <a:t>Chapter 1 — Introduction To Datasets</a:t>
+              <a:t>Chapter 1 — 01 Introduction To Datasets</a:t>
             </a:r>
           </a:p>
         </p:txBody>
@@ -4728,7 +5328,7 @@
                 </a:solidFill>
                 <a:latin typeface="Calibri"/>
               </a:rPr>
-              <a:t>Takeaways</a:t>
+              <a:t>Example 1.4 — Housing prices in JSON</a:t>
             </a:r>
           </a:p>
         </p:txBody>
@@ -4756,12 +5356,13 @@
           <a:lstStyle/>
           <a:p>
             <a:pPr>
-              <a:lnSpc>
-                <a:spcPts val="2200"/>
-              </a:lnSpc>
               <a:spcAft>
                 <a:spcPts val="1000"/>
               </a:spcAft>
+              <a:buChar char="•"/>
+              <a:lnSpc>
+                <a:spcPts val="2200"/>
+              </a:lnSpc>
             </a:pPr>
             <a:r>
               <a:rPr sz="2000" b="0">
@@ -4770,17 +5371,18 @@
                 </a:solidFill>
                 <a:latin typeface="Calibri"/>
               </a:rPr>
-              <a:t>• A dataset is curated for a purpose, not just a dump</a:t>
+              <a:t>Example 1.4 — hands-on module</a:t>
             </a:r>
           </a:p>
           <a:p>
             <a:pPr>
-              <a:lnSpc>
-                <a:spcPts val="2200"/>
-              </a:lnSpc>
               <a:spcAft>
                 <a:spcPts val="1000"/>
               </a:spcAft>
+              <a:buChar char="•"/>
+              <a:lnSpc>
+                <a:spcPts val="2200"/>
+              </a:lnSpc>
             </a:pPr>
             <a:r>
               <a:rPr sz="2000" b="0">
@@ -4789,17 +5391,18 @@
                 </a:solidFill>
                 <a:latin typeface="Calibri"/>
               </a:rPr>
-              <a:t>      of bytes</a:t>
+              <a:t>Example 1.4 JSON listings with nested fields (flexible schema)</a:t>
             </a:r>
           </a:p>
           <a:p>
             <a:pPr>
-              <a:lnSpc>
-                <a:spcPts val="2200"/>
-              </a:lnSpc>
               <a:spcAft>
                 <a:spcPts val="1000"/>
               </a:spcAft>
+              <a:buChar char="•"/>
+              <a:lnSpc>
+                <a:spcPts val="2200"/>
+              </a:lnSpc>
             </a:pPr>
             <a:r>
               <a:rPr sz="2000" b="0">
@@ -4808,17 +5411,18 @@
                 </a:solidFill>
                 <a:latin typeface="Calibri"/>
               </a:rPr>
-              <a:t>• Records + attributes are the core vocabulary</a:t>
+              <a:t>The form changes; the objective stays the same: meaningful, analyzable data</a:t>
             </a:r>
           </a:p>
           <a:p>
             <a:pPr>
-              <a:lnSpc>
-                <a:spcPts val="2200"/>
-              </a:lnSpc>
               <a:spcAft>
                 <a:spcPts val="1000"/>
               </a:spcAft>
+              <a:buChar char="•"/>
+              <a:lnSpc>
+                <a:spcPts val="2200"/>
+              </a:lnSpc>
             </a:pPr>
             <a:r>
               <a:rPr sz="2000" b="0">
@@ -4827,17 +5431,18 @@
                 </a:solidFill>
                 <a:latin typeface="Calibri"/>
               </a:rPr>
-              <a:t>• Form varies (CSV, JSON, images, text); the goal</a:t>
+              <a:t>Explore the chapter example module</a:t>
             </a:r>
           </a:p>
           <a:p>
             <a:pPr>
-              <a:lnSpc>
-                <a:spcPts val="2200"/>
-              </a:lnSpc>
               <a:spcAft>
                 <a:spcPts val="1000"/>
               </a:spcAft>
+              <a:buChar char="•"/>
+              <a:lnSpc>
+                <a:spcPts val="2200"/>
+              </a:lnSpc>
             </a:pPr>
             <a:r>
               <a:rPr sz="2000" b="0">
@@ -4846,7 +5451,7 @@
                 </a:solidFill>
                 <a:latin typeface="Calibri"/>
               </a:rPr>
-              <a:t>      stays insight</a:t>
+              <a:t>View files: `modules/chapter1/example4/`</a:t>
             </a:r>
           </a:p>
         </p:txBody>
@@ -4885,7 +5490,630 @@
               </a:defRPr>
             </a:pPr>
             <a:r>
-              <a:t>Chapter 1 — Introduction To Datasets</a:t>
+              <a:t>Chapter 1 — 01 Introduction To Datasets</a:t>
+            </a:r>
+          </a:p>
+        </p:txBody>
+      </p:sp>
+    </p:spTree>
+  </p:cSld>
+  <p:clrMapOvr>
+    <a:masterClrMapping/>
+  </p:clrMapOvr>
+</p:sld>
+</file>
+
+<file path=ppt/slides/slide8.xml><?xml version="1.0" encoding="utf-8"?>
+<p:sld xmlns:a="http://schemas.openxmlformats.org/drawingml/2006/main" xmlns:p="http://schemas.openxmlformats.org/presentationml/2006/main" xmlns:r="http://schemas.openxmlformats.org/officeDocument/2006/relationships">
+  <p:cSld>
+    <p:spTree>
+      <p:nvGrpSpPr>
+        <p:cNvPr id="1" name=""/>
+        <p:cNvGrpSpPr/>
+        <p:nvPr/>
+      </p:nvGrpSpPr>
+      <p:grpSpPr/>
+      <p:sp>
+        <p:nvSpPr>
+          <p:cNvPr id="2" name="TextBox 1"/>
+          <p:cNvSpPr txBox="1"/>
+          <p:nvPr/>
+        </p:nvSpPr>
+        <p:spPr>
+          <a:xfrm>
+            <a:off x="548640" y="411480"/>
+            <a:ext cx="11064240" cy="777240"/>
+          </a:xfrm>
+          <a:prstGeom prst="rect">
+            <a:avLst/>
+          </a:prstGeom>
+          <a:noFill/>
+        </p:spPr>
+        <p:txBody>
+          <a:bodyPr wrap="square">
+            <a:noAutofit/>
+          </a:bodyPr>
+          <a:lstStyle/>
+          <a:p>
+            <a:pPr>
+              <a:lnSpc>
+                <a:spcPts val="2200"/>
+              </a:lnSpc>
+            </a:pPr>
+            <a:r>
+              <a:rPr sz="2800" b="1">
+                <a:solidFill>
+                  <a:srgbClr val="1A1A2E"/>
+                </a:solidFill>
+                <a:latin typeface="Calibri"/>
+              </a:rPr>
+              <a:t>Example 1.4 — listing</a:t>
+            </a:r>
+          </a:p>
+        </p:txBody>
+      </p:sp>
+      <p:sp>
+        <p:nvSpPr>
+          <p:cNvPr id="3" name="TextBox 2"/>
+          <p:cNvSpPr txBox="1"/>
+          <p:nvPr/>
+        </p:nvSpPr>
+        <p:spPr>
+          <a:xfrm>
+            <a:off x="548640" y="1143000"/>
+            <a:ext cx="11064240" cy="5029200"/>
+          </a:xfrm>
+          <a:prstGeom prst="rect">
+            <a:avLst/>
+          </a:prstGeom>
+          <a:solidFill>
+            <a:srgbClr val="F4F4F4"/>
+          </a:solidFill>
+        </p:spPr>
+        <p:txBody>
+          <a:bodyPr wrap="square">
+            <a:noAutofit/>
+          </a:bodyPr>
+          <a:lstStyle/>
+          <a:p>
+            <a:pPr>
+              <a:lnSpc>
+                <a:spcPts val="2200"/>
+              </a:lnSpc>
+              <a:spcAft>
+                <a:spcPts val="400"/>
+              </a:spcAft>
+            </a:pPr>
+            <a:r>
+              <a:rPr sz="2000" b="0">
+                <a:solidFill>
+                  <a:srgbClr val="333333"/>
+                </a:solidFill>
+                <a:latin typeface="Consolas"/>
+              </a:rPr>
+              <a:t>[</a:t>
+            </a:r>
+          </a:p>
+          <a:p>
+            <a:pPr>
+              <a:lnSpc>
+                <a:spcPts val="2200"/>
+              </a:lnSpc>
+              <a:spcAft>
+                <a:spcPts val="400"/>
+              </a:spcAft>
+            </a:pPr>
+            <a:r>
+              <a:rPr sz="2000" b="0">
+                <a:solidFill>
+                  <a:srgbClr val="333333"/>
+                </a:solidFill>
+                <a:latin typeface="Consolas"/>
+              </a:rPr>
+              <a:t>  {</a:t>
+            </a:r>
+          </a:p>
+          <a:p>
+            <a:pPr>
+              <a:lnSpc>
+                <a:spcPts val="2200"/>
+              </a:lnSpc>
+              <a:spcAft>
+                <a:spcPts val="400"/>
+              </a:spcAft>
+            </a:pPr>
+            <a:r>
+              <a:rPr sz="2000" b="0">
+                <a:solidFill>
+                  <a:srgbClr val="333333"/>
+                </a:solidFill>
+                <a:latin typeface="Consolas"/>
+              </a:rPr>
+              <a:t>    "House_ID": 101,</a:t>
+            </a:r>
+          </a:p>
+          <a:p>
+            <a:pPr>
+              <a:lnSpc>
+                <a:spcPts val="2200"/>
+              </a:lnSpc>
+              <a:spcAft>
+                <a:spcPts val="400"/>
+              </a:spcAft>
+            </a:pPr>
+            <a:r>
+              <a:rPr sz="2000" b="0">
+                <a:solidFill>
+                  <a:srgbClr val="333333"/>
+                </a:solidFill>
+                <a:latin typeface="Consolas"/>
+              </a:rPr>
+              <a:t>    "Location": "New York",</a:t>
+            </a:r>
+          </a:p>
+          <a:p>
+            <a:pPr>
+              <a:lnSpc>
+                <a:spcPts val="2200"/>
+              </a:lnSpc>
+              <a:spcAft>
+                <a:spcPts val="400"/>
+              </a:spcAft>
+            </a:pPr>
+            <a:r>
+              <a:rPr sz="2000" b="0">
+                <a:solidFill>
+                  <a:srgbClr val="333333"/>
+                </a:solidFill>
+                <a:latin typeface="Consolas"/>
+              </a:rPr>
+              <a:t>    "Square_Footage": 2000,</a:t>
+            </a:r>
+          </a:p>
+          <a:p>
+            <a:pPr>
+              <a:lnSpc>
+                <a:spcPts val="2200"/>
+              </a:lnSpc>
+              <a:spcAft>
+                <a:spcPts val="400"/>
+              </a:spcAft>
+            </a:pPr>
+            <a:r>
+              <a:rPr sz="2000" b="0">
+                <a:solidFill>
+                  <a:srgbClr val="333333"/>
+                </a:solidFill>
+                <a:latin typeface="Consolas"/>
+              </a:rPr>
+              <a:t>    "Bedrooms": 3,</a:t>
+            </a:r>
+          </a:p>
+          <a:p>
+            <a:pPr>
+              <a:lnSpc>
+                <a:spcPts val="2200"/>
+              </a:lnSpc>
+              <a:spcAft>
+                <a:spcPts val="400"/>
+              </a:spcAft>
+            </a:pPr>
+            <a:r>
+              <a:rPr sz="2000" b="0">
+                <a:solidFill>
+                  <a:srgbClr val="333333"/>
+                </a:solidFill>
+                <a:latin typeface="Consolas"/>
+              </a:rPr>
+              <a:t>    "Proximity_to_Schools": "0.5 miles",</a:t>
+            </a:r>
+          </a:p>
+          <a:p>
+            <a:pPr>
+              <a:lnSpc>
+                <a:spcPts val="2200"/>
+              </a:lnSpc>
+              <a:spcAft>
+                <a:spcPts val="400"/>
+              </a:spcAft>
+            </a:pPr>
+            <a:r>
+              <a:rPr sz="2000" b="0">
+                <a:solidFill>
+                  <a:srgbClr val="333333"/>
+                </a:solidFill>
+                <a:latin typeface="Consolas"/>
+              </a:rPr>
+              <a:t>    "Price": 850000</a:t>
+            </a:r>
+          </a:p>
+          <a:p>
+            <a:pPr>
+              <a:lnSpc>
+                <a:spcPts val="2200"/>
+              </a:lnSpc>
+              <a:spcAft>
+                <a:spcPts val="400"/>
+              </a:spcAft>
+            </a:pPr>
+            <a:r>
+              <a:rPr sz="2000" b="0">
+                <a:solidFill>
+                  <a:srgbClr val="333333"/>
+                </a:solidFill>
+                <a:latin typeface="Consolas"/>
+              </a:rPr>
+              <a:t>  },</a:t>
+            </a:r>
+          </a:p>
+          <a:p>
+            <a:pPr>
+              <a:lnSpc>
+                <a:spcPts val="2200"/>
+              </a:lnSpc>
+              <a:spcAft>
+                <a:spcPts val="400"/>
+              </a:spcAft>
+            </a:pPr>
+            <a:r>
+              <a:rPr sz="2000" b="0">
+                <a:solidFill>
+                  <a:srgbClr val="333333"/>
+                </a:solidFill>
+                <a:latin typeface="Consolas"/>
+              </a:rPr>
+              <a:t>  {</a:t>
+            </a:r>
+          </a:p>
+          <a:p>
+            <a:pPr>
+              <a:lnSpc>
+                <a:spcPts val="2200"/>
+              </a:lnSpc>
+              <a:spcAft>
+                <a:spcPts val="400"/>
+              </a:spcAft>
+            </a:pPr>
+            <a:r>
+              <a:rPr sz="2000" b="0">
+                <a:solidFill>
+                  <a:srgbClr val="333333"/>
+                </a:solidFill>
+                <a:latin typeface="Consolas"/>
+              </a:rPr>
+              <a:t>    "House_ID": 102,</a:t>
+            </a:r>
+          </a:p>
+          <a:p>
+            <a:pPr>
+              <a:lnSpc>
+                <a:spcPts val="2200"/>
+              </a:lnSpc>
+              <a:spcAft>
+                <a:spcPts val="400"/>
+              </a:spcAft>
+            </a:pPr>
+            <a:r>
+              <a:rPr sz="2000" b="0">
+                <a:solidFill>
+                  <a:srgbClr val="333333"/>
+                </a:solidFill>
+                <a:latin typeface="Consolas"/>
+              </a:rPr>
+              <a:t>    "Location": "Los Angeles",</a:t>
+            </a:r>
+          </a:p>
+          <a:p>
+            <a:pPr>
+              <a:lnSpc>
+                <a:spcPts val="2200"/>
+              </a:lnSpc>
+              <a:spcAft>
+                <a:spcPts val="400"/>
+              </a:spcAft>
+            </a:pPr>
+            <a:r>
+              <a:rPr sz="2000" b="0">
+                <a:solidFill>
+                  <a:srgbClr val="333333"/>
+                </a:solidFill>
+                <a:latin typeface="Consolas"/>
+              </a:rPr>
+              <a:t>    "Square_Footage": 1800,</a:t>
+            </a:r>
+          </a:p>
+          <a:p>
+            <a:pPr>
+              <a:lnSpc>
+                <a:spcPts val="2200"/>
+              </a:lnSpc>
+              <a:spcAft>
+                <a:spcPts val="400"/>
+              </a:spcAft>
+            </a:pPr>
+            <a:r>
+              <a:rPr sz="2000" b="0">
+                <a:solidFill>
+                  <a:srgbClr val="333333"/>
+                </a:solidFill>
+                <a:latin typeface="Consolas"/>
+              </a:rPr>
+              <a:t>    "Bedrooms": 4,</a:t>
+            </a:r>
+          </a:p>
+          <a:p>
+            <a:pPr>
+              <a:lnSpc>
+                <a:spcPts val="2200"/>
+              </a:lnSpc>
+              <a:spcAft>
+                <a:spcPts val="400"/>
+              </a:spcAft>
+            </a:pPr>
+            <a:r>
+              <a:rPr sz="2000" b="0">
+                <a:solidFill>
+                  <a:srgbClr val="333333"/>
+                </a:solidFill>
+                <a:latin typeface="Consolas"/>
+              </a:rPr>
+              <a:t>    "Proximity_to_Schools": "1.2 miles",</a:t>
+            </a:r>
+          </a:p>
+          <a:p>
+            <a:pPr>
+              <a:lnSpc>
+                <a:spcPts val="2200"/>
+              </a:lnSpc>
+              <a:spcAft>
+                <a:spcPts val="400"/>
+              </a:spcAft>
+            </a:pPr>
+            <a:r>
+              <a:rPr sz="2000" b="0">
+                <a:solidFill>
+                  <a:srgbClr val="333333"/>
+                </a:solidFill>
+                <a:latin typeface="Consolas"/>
+              </a:rPr>
+              <a:t>    "Price": 720000</a:t>
+            </a:r>
+          </a:p>
+          <a:p>
+            <a:pPr>
+              <a:lnSpc>
+                <a:spcPts val="2200"/>
+              </a:lnSpc>
+              <a:spcAft>
+                <a:spcPts val="400"/>
+              </a:spcAft>
+            </a:pPr>
+            <a:r>
+              <a:rPr sz="2000" b="0">
+                <a:solidFill>
+                  <a:srgbClr val="333333"/>
+                </a:solidFill>
+                <a:latin typeface="Consolas"/>
+              </a:rPr>
+              <a:t># ...</a:t>
+            </a:r>
+          </a:p>
+        </p:txBody>
+      </p:sp>
+      <p:sp>
+        <p:nvSpPr>
+          <p:cNvPr id="4" name="TextBox 3"/>
+          <p:cNvSpPr txBox="1"/>
+          <p:nvPr/>
+        </p:nvSpPr>
+        <p:spPr>
+          <a:xfrm>
+            <a:off x="548640" y="6355080"/>
+            <a:ext cx="11064240" cy="320040"/>
+          </a:xfrm>
+          <a:prstGeom prst="rect">
+            <a:avLst/>
+          </a:prstGeom>
+          <a:noFill/>
+        </p:spPr>
+        <p:txBody>
+          <a:bodyPr wrap="square">
+            <a:noAutofit/>
+          </a:bodyPr>
+          <a:lstStyle/>
+          <a:p>
+            <a:pPr algn="r">
+              <a:lnSpc>
+                <a:spcPts val="2200"/>
+              </a:lnSpc>
+              <a:defRPr sz="1000" b="0">
+                <a:solidFill>
+                  <a:srgbClr val="666666"/>
+                </a:solidFill>
+                <a:latin typeface="Calibri"/>
+              </a:defRPr>
+            </a:pPr>
+            <a:r>
+              <a:t>Chapter 1 — 01 Introduction To Datasets</a:t>
+            </a:r>
+          </a:p>
+        </p:txBody>
+      </p:sp>
+    </p:spTree>
+  </p:cSld>
+  <p:clrMapOvr>
+    <a:masterClrMapping/>
+  </p:clrMapOvr>
+</p:sld>
+</file>
+
+<file path=ppt/slides/slide9.xml><?xml version="1.0" encoding="utf-8"?>
+<p:sld xmlns:a="http://schemas.openxmlformats.org/drawingml/2006/main" xmlns:p="http://schemas.openxmlformats.org/presentationml/2006/main" xmlns:r="http://schemas.openxmlformats.org/officeDocument/2006/relationships">
+  <p:cSld>
+    <p:spTree>
+      <p:nvGrpSpPr>
+        <p:cNvPr id="1" name=""/>
+        <p:cNvGrpSpPr/>
+        <p:nvPr/>
+      </p:nvGrpSpPr>
+      <p:grpSpPr/>
+      <p:sp>
+        <p:nvSpPr>
+          <p:cNvPr id="2" name="TextBox 1"/>
+          <p:cNvSpPr txBox="1"/>
+          <p:nvPr/>
+        </p:nvSpPr>
+        <p:spPr>
+          <a:xfrm>
+            <a:off x="548640" y="411480"/>
+            <a:ext cx="11064240" cy="777240"/>
+          </a:xfrm>
+          <a:prstGeom prst="rect">
+            <a:avLst/>
+          </a:prstGeom>
+          <a:noFill/>
+        </p:spPr>
+        <p:txBody>
+          <a:bodyPr wrap="square">
+            <a:noAutofit/>
+          </a:bodyPr>
+          <a:lstStyle/>
+          <a:p>
+            <a:pPr>
+              <a:lnSpc>
+                <a:spcPts val="2200"/>
+              </a:lnSpc>
+            </a:pPr>
+            <a:r>
+              <a:rPr sz="2800" b="1">
+                <a:solidFill>
+                  <a:srgbClr val="1A1A2E"/>
+                </a:solidFill>
+                <a:latin typeface="Calibri"/>
+              </a:rPr>
+              <a:t>Takeaways</a:t>
+            </a:r>
+          </a:p>
+        </p:txBody>
+      </p:sp>
+      <p:sp>
+        <p:nvSpPr>
+          <p:cNvPr id="3" name="TextBox 2"/>
+          <p:cNvSpPr txBox="1"/>
+          <p:nvPr/>
+        </p:nvSpPr>
+        <p:spPr>
+          <a:xfrm>
+            <a:off x="548640" y="1234440"/>
+            <a:ext cx="11064240" cy="4937760"/>
+          </a:xfrm>
+          <a:prstGeom prst="rect">
+            <a:avLst/>
+          </a:prstGeom>
+          <a:noFill/>
+        </p:spPr>
+        <p:txBody>
+          <a:bodyPr wrap="square">
+            <a:noAutofit/>
+          </a:bodyPr>
+          <a:lstStyle/>
+          <a:p>
+            <a:pPr>
+              <a:spcAft>
+                <a:spcPts val="1000"/>
+              </a:spcAft>
+              <a:buChar char="•"/>
+              <a:lnSpc>
+                <a:spcPts val="2200"/>
+              </a:lnSpc>
+            </a:pPr>
+            <a:r>
+              <a:rPr sz="2000" b="0">
+                <a:solidFill>
+                  <a:srgbClr val="333333"/>
+                </a:solidFill>
+                <a:latin typeface="Calibri"/>
+              </a:rPr>
+              <a:t>A dataset is prepared for a purpose</a:t>
+            </a:r>
+          </a:p>
+          <a:p>
+            <a:pPr>
+              <a:spcAft>
+                <a:spcPts val="1000"/>
+              </a:spcAft>
+              <a:buChar char="•"/>
+              <a:lnSpc>
+                <a:spcPts val="2200"/>
+              </a:lnSpc>
+            </a:pPr>
+            <a:r>
+              <a:rPr sz="2000" b="0">
+                <a:solidFill>
+                  <a:srgbClr val="333333"/>
+                </a:solidFill>
+                <a:latin typeface="Calibri"/>
+              </a:rPr>
+              <a:t>Records and attributes are the shared vocabulary</a:t>
+            </a:r>
+          </a:p>
+          <a:p>
+            <a:pPr>
+              <a:spcAft>
+                <a:spcPts val="1000"/>
+              </a:spcAft>
+              <a:buChar char="•"/>
+              <a:lnSpc>
+                <a:spcPts val="2200"/>
+              </a:lnSpc>
+            </a:pPr>
+            <a:r>
+              <a:rPr sz="2000" b="0">
+                <a:solidFill>
+                  <a:srgbClr val="333333"/>
+                </a:solidFill>
+                <a:latin typeface="Calibri"/>
+              </a:rPr>
+              <a:t>Formats and modalities vary widely, but the goal of interpretable, usable data does not</a:t>
+            </a:r>
+          </a:p>
+        </p:txBody>
+      </p:sp>
+      <p:sp>
+        <p:nvSpPr>
+          <p:cNvPr id="4" name="TextBox 3"/>
+          <p:cNvSpPr txBox="1"/>
+          <p:nvPr/>
+        </p:nvSpPr>
+        <p:spPr>
+          <a:xfrm>
+            <a:off x="548640" y="6355080"/>
+            <a:ext cx="11064240" cy="320040"/>
+          </a:xfrm>
+          <a:prstGeom prst="rect">
+            <a:avLst/>
+          </a:prstGeom>
+          <a:noFill/>
+        </p:spPr>
+        <p:txBody>
+          <a:bodyPr wrap="square">
+            <a:noAutofit/>
+          </a:bodyPr>
+          <a:lstStyle/>
+          <a:p>
+            <a:pPr algn="r">
+              <a:lnSpc>
+                <a:spcPts val="2200"/>
+              </a:lnSpc>
+              <a:defRPr sz="1000" b="0">
+                <a:solidFill>
+                  <a:srgbClr val="666666"/>
+                </a:solidFill>
+                <a:latin typeface="Calibri"/>
+              </a:defRPr>
+            </a:pPr>
+            <a:r>
+              <a:t>Chapter 1 — 01 Introduction To Datasets</a:t>
             </a:r>
           </a:p>
         </p:txBody>
